--- a/PPTs/Ch6_ARM_Control_Flow_Exercises_ANS.pptx
+++ b/PPTs/Ch6_ARM_Control_Flow_Exercises_ANS.pptx
@@ -23,7 +23,7 @@
     <p:sldId id="375" r:id="rId14"/>
     <p:sldId id="381" r:id="rId15"/>
     <p:sldId id="394" r:id="rId16"/>
-    <p:sldId id="392" r:id="rId17"/>
+    <p:sldId id="396" r:id="rId17"/>
     <p:sldId id="380" r:id="rId18"/>
     <p:sldId id="374" r:id="rId19"/>
     <p:sldId id="395" r:id="rId20"/>
@@ -790,7 +790,7 @@
             <a:fld id="{2AEAFE1F-9E52-45C8-9793-E819F0044A1C}" type="datetimeFigureOut">
               <a:rPr lang="en-US" smtClean="0"/>
               <a:pPr/>
-              <a:t>12/3/2025</a:t>
+              <a:t>4/9/2026</a:t>
             </a:fld>
             <a:endParaRPr lang="en-US"/>
           </a:p>
@@ -1311,6 +1311,115 @@
   <p:cSld>
     <p:spTree>
       <p:nvGrpSpPr>
+        <p:cNvPr id="1" name="">
+          <a:extLst>
+            <a:ext uri="{FF2B5EF4-FFF2-40B4-BE49-F238E27FC236}">
+              <a16:creationId xmlns:a16="http://schemas.microsoft.com/office/drawing/2014/main" id="{661412AB-13B4-B035-0958-DA9C98290BE8}"/>
+            </a:ext>
+          </a:extLst>
+        </p:cNvPr>
+        <p:cNvGrpSpPr/>
+        <p:nvPr/>
+      </p:nvGrpSpPr>
+      <p:grpSpPr>
+        <a:xfrm>
+          <a:off x="0" y="0"/>
+          <a:ext cx="0" cy="0"/>
+          <a:chOff x="0" y="0"/>
+          <a:chExt cx="0" cy="0"/>
+        </a:xfrm>
+      </p:grpSpPr>
+      <p:sp>
+        <p:nvSpPr>
+          <p:cNvPr id="2" name="Slide Image Placeholder 1">
+            <a:extLst>
+              <a:ext uri="{FF2B5EF4-FFF2-40B4-BE49-F238E27FC236}">
+                <a16:creationId xmlns:a16="http://schemas.microsoft.com/office/drawing/2014/main" id="{9E6F495B-59BA-E964-8205-8317BD120C93}"/>
+              </a:ext>
+            </a:extLst>
+          </p:cNvPr>
+          <p:cNvSpPr>
+            <a:spLocks noGrp="1" noRot="1" noChangeAspect="1"/>
+          </p:cNvSpPr>
+          <p:nvPr>
+            <p:ph type="sldImg"/>
+          </p:nvPr>
+        </p:nvSpPr>
+        <p:spPr/>
+      </p:sp>
+      <p:sp>
+        <p:nvSpPr>
+          <p:cNvPr id="3" name="Notes Placeholder 2">
+            <a:extLst>
+              <a:ext uri="{FF2B5EF4-FFF2-40B4-BE49-F238E27FC236}">
+                <a16:creationId xmlns:a16="http://schemas.microsoft.com/office/drawing/2014/main" id="{870832F4-7DCD-B8E4-7248-B122F9B2AC16}"/>
+              </a:ext>
+            </a:extLst>
+          </p:cNvPr>
+          <p:cNvSpPr>
+            <a:spLocks noGrp="1"/>
+          </p:cNvSpPr>
+          <p:nvPr>
+            <p:ph type="body" idx="1"/>
+          </p:nvPr>
+        </p:nvSpPr>
+        <p:spPr/>
+        <p:txBody>
+          <a:bodyPr/>
+          <a:lstStyle/>
+          <a:p>
+            <a:endParaRPr lang="en-US" dirty="0"/>
+          </a:p>
+        </p:txBody>
+      </p:sp>
+      <p:sp>
+        <p:nvSpPr>
+          <p:cNvPr id="4" name="Slide Number Placeholder 3">
+            <a:extLst>
+              <a:ext uri="{FF2B5EF4-FFF2-40B4-BE49-F238E27FC236}">
+                <a16:creationId xmlns:a16="http://schemas.microsoft.com/office/drawing/2014/main" id="{F7B25462-90E1-D5A5-988E-2D33F273D747}"/>
+              </a:ext>
+            </a:extLst>
+          </p:cNvPr>
+          <p:cNvSpPr>
+            <a:spLocks noGrp="1"/>
+          </p:cNvSpPr>
+          <p:nvPr>
+            <p:ph type="sldNum" sz="quarter" idx="5"/>
+          </p:nvPr>
+        </p:nvSpPr>
+        <p:spPr/>
+        <p:txBody>
+          <a:bodyPr/>
+          <a:lstStyle/>
+          <a:p>
+            <a:fld id="{2D71AD5F-E36F-46B9-A99B-7B025244359D}" type="slidenum">
+              <a:rPr lang="en-US" smtClean="0"/>
+              <a:pPr/>
+              <a:t>17</a:t>
+            </a:fld>
+            <a:endParaRPr lang="en-US"/>
+          </a:p>
+        </p:txBody>
+      </p:sp>
+    </p:spTree>
+    <p:extLst>
+      <p:ext uri="{BB962C8B-B14F-4D97-AF65-F5344CB8AC3E}">
+        <p14:creationId xmlns:p14="http://schemas.microsoft.com/office/powerpoint/2010/main" val="3133580365"/>
+      </p:ext>
+    </p:extLst>
+  </p:cSld>
+  <p:clrMapOvr>
+    <a:masterClrMapping/>
+  </p:clrMapOvr>
+</p:notes>
+</file>
+
+<file path=ppt/notesSlides/notesSlide11.xml><?xml version="1.0" encoding="utf-8"?>
+<p:notes xmlns:a="http://schemas.openxmlformats.org/drawingml/2006/main" xmlns:r="http://schemas.openxmlformats.org/officeDocument/2006/relationships" xmlns:p="http://schemas.openxmlformats.org/presentationml/2006/main">
+  <p:cSld>
+    <p:spTree>
+      <p:nvGrpSpPr>
         <p:cNvPr id="1" name=""/>
         <p:cNvGrpSpPr/>
         <p:nvPr/>
@@ -1391,7 +1500,7 @@
 </p:notes>
 </file>
 
-<file path=ppt/notesSlides/notesSlide11.xml><?xml version="1.0" encoding="utf-8"?>
+<file path=ppt/notesSlides/notesSlide12.xml><?xml version="1.0" encoding="utf-8"?>
 <p:notes xmlns:a="http://schemas.openxmlformats.org/drawingml/2006/main" xmlns:r="http://schemas.openxmlformats.org/officeDocument/2006/relationships" xmlns:p="http://schemas.openxmlformats.org/presentationml/2006/main">
   <p:cSld>
     <p:spTree>
@@ -1500,7 +1609,7 @@
 </p:notes>
 </file>
 
-<file path=ppt/notesSlides/notesSlide12.xml><?xml version="1.0" encoding="utf-8"?>
+<file path=ppt/notesSlides/notesSlide13.xml><?xml version="1.0" encoding="utf-8"?>
 <p:notes xmlns:a="http://schemas.openxmlformats.org/drawingml/2006/main" xmlns:r="http://schemas.openxmlformats.org/officeDocument/2006/relationships" xmlns:p="http://schemas.openxmlformats.org/presentationml/2006/main">
   <p:cSld>
     <p:spTree>
@@ -1651,133 +1760,6 @@
 </p:notes>
 </file>
 
-<file path=ppt/notesSlides/notesSlide13.xml><?xml version="1.0" encoding="utf-8"?>
-<p:notes xmlns:a="http://schemas.openxmlformats.org/drawingml/2006/main" xmlns:r="http://schemas.openxmlformats.org/officeDocument/2006/relationships" xmlns:p="http://schemas.openxmlformats.org/presentationml/2006/main">
-  <p:cSld>
-    <p:spTree>
-      <p:nvGrpSpPr>
-        <p:cNvPr id="1" name=""/>
-        <p:cNvGrpSpPr/>
-        <p:nvPr/>
-      </p:nvGrpSpPr>
-      <p:grpSpPr>
-        <a:xfrm>
-          <a:off x="0" y="0"/>
-          <a:ext cx="0" cy="0"/>
-          <a:chOff x="0" y="0"/>
-          <a:chExt cx="0" cy="0"/>
-        </a:xfrm>
-      </p:grpSpPr>
-      <p:sp>
-        <p:nvSpPr>
-          <p:cNvPr id="2" name="Slide Image Placeholder 1"/>
-          <p:cNvSpPr>
-            <a:spLocks noGrp="1" noRot="1" noChangeAspect="1"/>
-          </p:cNvSpPr>
-          <p:nvPr>
-            <p:ph type="sldImg"/>
-          </p:nvPr>
-        </p:nvSpPr>
-        <p:spPr/>
-      </p:sp>
-      <p:sp>
-        <p:nvSpPr>
-          <p:cNvPr id="3" name="Notes Placeholder 2"/>
-          <p:cNvSpPr>
-            <a:spLocks noGrp="1"/>
-          </p:cNvSpPr>
-          <p:nvPr>
-            <p:ph type="body" idx="1"/>
-          </p:nvPr>
-        </p:nvSpPr>
-        <p:spPr/>
-        <p:txBody>
-          <a:bodyPr/>
-          <a:lstStyle/>
-          <a:p>
-            <a:r>
-              <a:rPr lang="en-US" dirty="0"/>
-              <a:t>No—do not replace BNE with BPL in that loop.image.jpg</a:t>
-            </a:r>
-          </a:p>
-          <a:p>
-            <a:r>
-              <a:rPr lang="en-US" b="1" dirty="0"/>
-              <a:t>Why BNE is correct</a:t>
-            </a:r>
-          </a:p>
-          <a:p>
-            <a:r>
-              <a:rPr lang="en-US" dirty="0"/>
-              <a:t>After SUB r0, r0, #1, the Zero flag Z is set only when r0 becomes 0, so BNE (“branch if not equal to zero”) repeats exactly until the counter hits 0, giving 10 iterations from an initial value of 10.image.jpg</a:t>
-            </a:r>
-          </a:p>
-          <a:p>
-            <a:r>
-              <a:rPr lang="en-US" b="1" dirty="0"/>
-              <a:t>Why BPL is wrong here</a:t>
-            </a:r>
-          </a:p>
-          <a:p>
-            <a:r>
-              <a:rPr lang="en-US" dirty="0"/>
-              <a:t>BPL tests the Negative flag N=0 (i.e., “plus/non‑negative”), not whether the value is nonzero. Starting from 10 and decrementing, N stays 0 for 10 down to 0, so BPL would still branch at r0=0 and continue into −1</a:t>
-            </a:r>
-          </a:p>
-          <a:p>
-            <a:r>
-              <a:rPr lang="en-US" b="1" dirty="0"/>
-              <a:t>If using “plus” logic</a:t>
-            </a:r>
-          </a:p>
-          <a:p>
-            <a:r>
-              <a:rPr lang="en-US" dirty="0"/>
-              <a:t>To stop before going negative, the condition would need to be “branch while r0 &gt; 0,” which is achieved with BGT after a CMP r0,#0 or by keeping BNE after SUBS. Using BPL alone does not encode “greater than zero.”</a:t>
-            </a:r>
-          </a:p>
-          <a:p>
-            <a:endParaRPr lang="en-US" dirty="0"/>
-          </a:p>
-        </p:txBody>
-      </p:sp>
-      <p:sp>
-        <p:nvSpPr>
-          <p:cNvPr id="4" name="Slide Number Placeholder 3"/>
-          <p:cNvSpPr>
-            <a:spLocks noGrp="1"/>
-          </p:cNvSpPr>
-          <p:nvPr>
-            <p:ph type="sldNum" sz="quarter" idx="5"/>
-          </p:nvPr>
-        </p:nvSpPr>
-        <p:spPr/>
-        <p:txBody>
-          <a:bodyPr/>
-          <a:lstStyle/>
-          <a:p>
-            <a:fld id="{2D71AD5F-E36F-46B9-A99B-7B025244359D}" type="slidenum">
-              <a:rPr lang="en-US" smtClean="0"/>
-              <a:pPr/>
-              <a:t>21</a:t>
-            </a:fld>
-            <a:endParaRPr lang="en-US"/>
-          </a:p>
-        </p:txBody>
-      </p:sp>
-    </p:spTree>
-    <p:extLst>
-      <p:ext uri="{BB962C8B-B14F-4D97-AF65-F5344CB8AC3E}">
-        <p14:creationId xmlns:p14="http://schemas.microsoft.com/office/powerpoint/2010/main" val="3349224179"/>
-      </p:ext>
-    </p:extLst>
-  </p:cSld>
-  <p:clrMapOvr>
-    <a:masterClrMapping/>
-  </p:clrMapOvr>
-</p:notes>
-</file>
-
 <file path=ppt/notesSlides/notesSlide14.xml><?xml version="1.0" encoding="utf-8"?>
 <p:notes xmlns:a="http://schemas.openxmlformats.org/drawingml/2006/main" xmlns:r="http://schemas.openxmlformats.org/officeDocument/2006/relationships" xmlns:p="http://schemas.openxmlformats.org/presentationml/2006/main">
   <p:cSld>
@@ -1822,6 +1804,48 @@
           <a:bodyPr/>
           <a:lstStyle/>
           <a:p>
+            <a:r>
+              <a:rPr lang="en-US" dirty="0"/>
+              <a:t>No—do not replace BNE with BPL in that loop.image.jpg</a:t>
+            </a:r>
+          </a:p>
+          <a:p>
+            <a:r>
+              <a:rPr lang="en-US" b="1" dirty="0"/>
+              <a:t>Why BNE is correct</a:t>
+            </a:r>
+          </a:p>
+          <a:p>
+            <a:r>
+              <a:rPr lang="en-US" dirty="0"/>
+              <a:t>After SUB r0, r0, #1, the Zero flag Z is set only when r0 becomes 0, so BNE (“branch if not equal to zero”) repeats exactly until the counter hits 0, giving 10 iterations from an initial value of 10.image.jpg</a:t>
+            </a:r>
+          </a:p>
+          <a:p>
+            <a:r>
+              <a:rPr lang="en-US" b="1" dirty="0"/>
+              <a:t>Why BPL is wrong here</a:t>
+            </a:r>
+          </a:p>
+          <a:p>
+            <a:r>
+              <a:rPr lang="en-US" dirty="0"/>
+              <a:t>BPL tests the Negative flag N=0 (i.e., “plus/non‑negative”), not whether the value is nonzero. Starting from 10 and decrementing, N stays 0 for 10 down to 0, so BPL would still branch at r0=0 and continue into −1</a:t>
+            </a:r>
+          </a:p>
+          <a:p>
+            <a:r>
+              <a:rPr lang="en-US" b="1" dirty="0"/>
+              <a:t>If using “plus” logic</a:t>
+            </a:r>
+          </a:p>
+          <a:p>
+            <a:r>
+              <a:rPr lang="en-US" dirty="0"/>
+              <a:t>To stop before going negative, the condition would need to be “branch while r0 &gt; 0,” which is achieved with BGT after a CMP r0,#0 or by keeping BNE after SUBS. Using BPL alone does not encode “greater than zero.”</a:t>
+            </a:r>
+          </a:p>
+          <a:p>
             <a:endParaRPr lang="en-US" dirty="0"/>
           </a:p>
         </p:txBody>
@@ -1844,6 +1868,91 @@
             <a:fld id="{2D71AD5F-E36F-46B9-A99B-7B025244359D}" type="slidenum">
               <a:rPr lang="en-US" smtClean="0"/>
               <a:pPr/>
+              <a:t>21</a:t>
+            </a:fld>
+            <a:endParaRPr lang="en-US"/>
+          </a:p>
+        </p:txBody>
+      </p:sp>
+    </p:spTree>
+    <p:extLst>
+      <p:ext uri="{BB962C8B-B14F-4D97-AF65-F5344CB8AC3E}">
+        <p14:creationId xmlns:p14="http://schemas.microsoft.com/office/powerpoint/2010/main" val="3349224179"/>
+      </p:ext>
+    </p:extLst>
+  </p:cSld>
+  <p:clrMapOvr>
+    <a:masterClrMapping/>
+  </p:clrMapOvr>
+</p:notes>
+</file>
+
+<file path=ppt/notesSlides/notesSlide15.xml><?xml version="1.0" encoding="utf-8"?>
+<p:notes xmlns:a="http://schemas.openxmlformats.org/drawingml/2006/main" xmlns:r="http://schemas.openxmlformats.org/officeDocument/2006/relationships" xmlns:p="http://schemas.openxmlformats.org/presentationml/2006/main">
+  <p:cSld>
+    <p:spTree>
+      <p:nvGrpSpPr>
+        <p:cNvPr id="1" name=""/>
+        <p:cNvGrpSpPr/>
+        <p:nvPr/>
+      </p:nvGrpSpPr>
+      <p:grpSpPr>
+        <a:xfrm>
+          <a:off x="0" y="0"/>
+          <a:ext cx="0" cy="0"/>
+          <a:chOff x="0" y="0"/>
+          <a:chExt cx="0" cy="0"/>
+        </a:xfrm>
+      </p:grpSpPr>
+      <p:sp>
+        <p:nvSpPr>
+          <p:cNvPr id="2" name="Slide Image Placeholder 1"/>
+          <p:cNvSpPr>
+            <a:spLocks noGrp="1" noRot="1" noChangeAspect="1"/>
+          </p:cNvSpPr>
+          <p:nvPr>
+            <p:ph type="sldImg"/>
+          </p:nvPr>
+        </p:nvSpPr>
+        <p:spPr/>
+      </p:sp>
+      <p:sp>
+        <p:nvSpPr>
+          <p:cNvPr id="3" name="Notes Placeholder 2"/>
+          <p:cNvSpPr>
+            <a:spLocks noGrp="1"/>
+          </p:cNvSpPr>
+          <p:nvPr>
+            <p:ph type="body" idx="1"/>
+          </p:nvPr>
+        </p:nvSpPr>
+        <p:spPr/>
+        <p:txBody>
+          <a:bodyPr/>
+          <a:lstStyle/>
+          <a:p>
+            <a:endParaRPr lang="en-US" dirty="0"/>
+          </a:p>
+        </p:txBody>
+      </p:sp>
+      <p:sp>
+        <p:nvSpPr>
+          <p:cNvPr id="4" name="Slide Number Placeholder 3"/>
+          <p:cNvSpPr>
+            <a:spLocks noGrp="1"/>
+          </p:cNvSpPr>
+          <p:nvPr>
+            <p:ph type="sldNum" sz="quarter" idx="5"/>
+          </p:nvPr>
+        </p:nvSpPr>
+        <p:spPr/>
+        <p:txBody>
+          <a:bodyPr/>
+          <a:lstStyle/>
+          <a:p>
+            <a:fld id="{2D71AD5F-E36F-46B9-A99B-7B025244359D}" type="slidenum">
+              <a:rPr lang="en-US" smtClean="0"/>
+              <a:pPr/>
               <a:t>25</a:t>
             </a:fld>
             <a:endParaRPr lang="en-US"/>
@@ -1863,7 +1972,7 @@
 </p:notes>
 </file>
 
-<file path=ppt/notesSlides/notesSlide15.xml><?xml version="1.0" encoding="utf-8"?>
+<file path=ppt/notesSlides/notesSlide16.xml><?xml version="1.0" encoding="utf-8"?>
 <p:notes xmlns:a="http://schemas.openxmlformats.org/drawingml/2006/main" xmlns:r="http://schemas.openxmlformats.org/officeDocument/2006/relationships" xmlns:p="http://schemas.openxmlformats.org/presentationml/2006/main">
   <p:cSld>
     <p:spTree>
@@ -1980,99 +2089,6 @@
 </p:notes>
 </file>
 
-<file path=ppt/notesSlides/notesSlide16.xml><?xml version="1.0" encoding="utf-8"?>
-<p:notes xmlns:a="http://schemas.openxmlformats.org/drawingml/2006/main" xmlns:r="http://schemas.openxmlformats.org/officeDocument/2006/relationships" xmlns:p="http://schemas.openxmlformats.org/presentationml/2006/main">
-  <p:cSld>
-    <p:spTree>
-      <p:nvGrpSpPr>
-        <p:cNvPr id="1" name=""/>
-        <p:cNvGrpSpPr/>
-        <p:nvPr/>
-      </p:nvGrpSpPr>
-      <p:grpSpPr>
-        <a:xfrm>
-          <a:off x="0" y="0"/>
-          <a:ext cx="0" cy="0"/>
-          <a:chOff x="0" y="0"/>
-          <a:chExt cx="0" cy="0"/>
-        </a:xfrm>
-      </p:grpSpPr>
-      <p:sp>
-        <p:nvSpPr>
-          <p:cNvPr id="2" name="Slide Image Placeholder 1"/>
-          <p:cNvSpPr>
-            <a:spLocks noGrp="1" noRot="1" noChangeAspect="1"/>
-          </p:cNvSpPr>
-          <p:nvPr>
-            <p:ph type="sldImg"/>
-          </p:nvPr>
-        </p:nvSpPr>
-        <p:spPr/>
-      </p:sp>
-      <p:sp>
-        <p:nvSpPr>
-          <p:cNvPr id="3" name="Notes Placeholder 2"/>
-          <p:cNvSpPr>
-            <a:spLocks noGrp="1"/>
-          </p:cNvSpPr>
-          <p:nvPr>
-            <p:ph type="body" idx="1"/>
-          </p:nvPr>
-        </p:nvSpPr>
-        <p:spPr/>
-        <p:txBody>
-          <a:bodyPr/>
-          <a:lstStyle/>
-          <a:p>
-            <a:r>
-              <a:rPr lang="pt-BR" sz="1200" i="0" dirty="0">
-                <a:effectLst/>
-                <a:latin typeface="Consolas" panose="020B0609020204030204" pitchFamily="49" charset="0"/>
-                <a:cs typeface="Consolas" panose="020B0609020204030204" pitchFamily="49" charset="0"/>
-              </a:rPr>
-              <a:t> bx lr</a:t>
-            </a:r>
-            <a:endParaRPr lang="en-US" dirty="0"/>
-          </a:p>
-        </p:txBody>
-      </p:sp>
-      <p:sp>
-        <p:nvSpPr>
-          <p:cNvPr id="4" name="Slide Number Placeholder 3"/>
-          <p:cNvSpPr>
-            <a:spLocks noGrp="1"/>
-          </p:cNvSpPr>
-          <p:nvPr>
-            <p:ph type="sldNum" sz="quarter" idx="5"/>
-          </p:nvPr>
-        </p:nvSpPr>
-        <p:spPr/>
-        <p:txBody>
-          <a:bodyPr/>
-          <a:lstStyle/>
-          <a:p>
-            <a:fld id="{2D71AD5F-E36F-46B9-A99B-7B025244359D}" type="slidenum">
-              <a:rPr lang="en-US" smtClean="0"/>
-              <a:pPr/>
-              <a:t>28</a:t>
-            </a:fld>
-            <a:endParaRPr lang="en-US"/>
-          </a:p>
-        </p:txBody>
-      </p:sp>
-    </p:spTree>
-    <p:extLst>
-      <p:ext uri="{BB962C8B-B14F-4D97-AF65-F5344CB8AC3E}">
-        <p14:creationId xmlns:p14="http://schemas.microsoft.com/office/powerpoint/2010/main" val="1438093478"/>
-      </p:ext>
-    </p:extLst>
-  </p:cSld>
-  <p:clrMapOvr>
-    <a:masterClrMapping/>
-  </p:clrMapOvr>
-</p:notes>
-</file>
-
 <file path=ppt/notesSlides/notesSlide17.xml><?xml version="1.0" encoding="utf-8"?>
 <p:notes xmlns:a="http://schemas.openxmlformats.org/drawingml/2006/main" xmlns:r="http://schemas.openxmlformats.org/officeDocument/2006/relationships" xmlns:p="http://schemas.openxmlformats.org/presentationml/2006/main">
   <p:cSld>
@@ -2118,9 +2134,14 @@
           <a:lstStyle/>
           <a:p>
             <a:r>
-              <a:rPr lang="en-US" dirty="0"/>
-              <a:t>https://thinkingeek.com/2013/01/20/arm-assembler-raspberry-pi-chapter-6/</a:t>
-            </a:r>
+              <a:rPr lang="pt-BR" sz="1200" i="0" dirty="0">
+                <a:effectLst/>
+                <a:latin typeface="Consolas" panose="020B0609020204030204" pitchFamily="49" charset="0"/>
+                <a:cs typeface="Consolas" panose="020B0609020204030204" pitchFamily="49" charset="0"/>
+              </a:rPr>
+              <a:t> bx lr</a:t>
+            </a:r>
+            <a:endParaRPr lang="en-US" dirty="0"/>
           </a:p>
         </p:txBody>
       </p:sp>
@@ -2142,6 +2163,94 @@
             <a:fld id="{2D71AD5F-E36F-46B9-A99B-7B025244359D}" type="slidenum">
               <a:rPr lang="en-US" smtClean="0"/>
               <a:pPr/>
+              <a:t>28</a:t>
+            </a:fld>
+            <a:endParaRPr lang="en-US"/>
+          </a:p>
+        </p:txBody>
+      </p:sp>
+    </p:spTree>
+    <p:extLst>
+      <p:ext uri="{BB962C8B-B14F-4D97-AF65-F5344CB8AC3E}">
+        <p14:creationId xmlns:p14="http://schemas.microsoft.com/office/powerpoint/2010/main" val="1438093478"/>
+      </p:ext>
+    </p:extLst>
+  </p:cSld>
+  <p:clrMapOvr>
+    <a:masterClrMapping/>
+  </p:clrMapOvr>
+</p:notes>
+</file>
+
+<file path=ppt/notesSlides/notesSlide18.xml><?xml version="1.0" encoding="utf-8"?>
+<p:notes xmlns:a="http://schemas.openxmlformats.org/drawingml/2006/main" xmlns:r="http://schemas.openxmlformats.org/officeDocument/2006/relationships" xmlns:p="http://schemas.openxmlformats.org/presentationml/2006/main">
+  <p:cSld>
+    <p:spTree>
+      <p:nvGrpSpPr>
+        <p:cNvPr id="1" name=""/>
+        <p:cNvGrpSpPr/>
+        <p:nvPr/>
+      </p:nvGrpSpPr>
+      <p:grpSpPr>
+        <a:xfrm>
+          <a:off x="0" y="0"/>
+          <a:ext cx="0" cy="0"/>
+          <a:chOff x="0" y="0"/>
+          <a:chExt cx="0" cy="0"/>
+        </a:xfrm>
+      </p:grpSpPr>
+      <p:sp>
+        <p:nvSpPr>
+          <p:cNvPr id="2" name="Slide Image Placeholder 1"/>
+          <p:cNvSpPr>
+            <a:spLocks noGrp="1" noRot="1" noChangeAspect="1"/>
+          </p:cNvSpPr>
+          <p:nvPr>
+            <p:ph type="sldImg"/>
+          </p:nvPr>
+        </p:nvSpPr>
+        <p:spPr/>
+      </p:sp>
+      <p:sp>
+        <p:nvSpPr>
+          <p:cNvPr id="3" name="Notes Placeholder 2"/>
+          <p:cNvSpPr>
+            <a:spLocks noGrp="1"/>
+          </p:cNvSpPr>
+          <p:nvPr>
+            <p:ph type="body" idx="1"/>
+          </p:nvPr>
+        </p:nvSpPr>
+        <p:spPr/>
+        <p:txBody>
+          <a:bodyPr/>
+          <a:lstStyle/>
+          <a:p>
+            <a:r>
+              <a:rPr lang="en-US" dirty="0"/>
+              <a:t>https://thinkingeek.com/2013/01/20/arm-assembler-raspberry-pi-chapter-6/</a:t>
+            </a:r>
+          </a:p>
+        </p:txBody>
+      </p:sp>
+      <p:sp>
+        <p:nvSpPr>
+          <p:cNvPr id="4" name="Slide Number Placeholder 3"/>
+          <p:cNvSpPr>
+            <a:spLocks noGrp="1"/>
+          </p:cNvSpPr>
+          <p:nvPr>
+            <p:ph type="sldNum" sz="quarter" idx="5"/>
+          </p:nvPr>
+        </p:nvSpPr>
+        <p:spPr/>
+        <p:txBody>
+          <a:bodyPr/>
+          <a:lstStyle/>
+          <a:p>
+            <a:fld id="{2D71AD5F-E36F-46B9-A99B-7B025244359D}" type="slidenum">
+              <a:rPr lang="en-US" smtClean="0"/>
+              <a:pPr/>
               <a:t>29</a:t>
             </a:fld>
             <a:endParaRPr lang="en-US"/>
@@ -2161,7 +2270,7 @@
 </p:notes>
 </file>
 
-<file path=ppt/notesSlides/notesSlide18.xml><?xml version="1.0" encoding="utf-8"?>
+<file path=ppt/notesSlides/notesSlide19.xml><?xml version="1.0" encoding="utf-8"?>
 <p:notes xmlns:a="http://schemas.openxmlformats.org/drawingml/2006/main" xmlns:r="http://schemas.openxmlformats.org/officeDocument/2006/relationships" xmlns:p="http://schemas.openxmlformats.org/presentationml/2006/main">
   <p:cSld>
     <p:spTree>
@@ -2251,138 +2360,6 @@
     <p:extLst>
       <p:ext uri="{BB962C8B-B14F-4D97-AF65-F5344CB8AC3E}">
         <p14:creationId xmlns:p14="http://schemas.microsoft.com/office/powerpoint/2010/main" val="217268282"/>
-      </p:ext>
-    </p:extLst>
-  </p:cSld>
-  <p:clrMapOvr>
-    <a:masterClrMapping/>
-  </p:clrMapOvr>
-</p:notes>
-</file>
-
-<file path=ppt/notesSlides/notesSlide19.xml><?xml version="1.0" encoding="utf-8"?>
-<p:notes xmlns:a="http://schemas.openxmlformats.org/drawingml/2006/main" xmlns:r="http://schemas.openxmlformats.org/officeDocument/2006/relationships" xmlns:p="http://schemas.openxmlformats.org/presentationml/2006/main">
-  <p:cSld>
-    <p:spTree>
-      <p:nvGrpSpPr>
-        <p:cNvPr id="1" name="">
-          <a:extLst>
-            <a:ext uri="{FF2B5EF4-FFF2-40B4-BE49-F238E27FC236}">
-              <a16:creationId xmlns:a16="http://schemas.microsoft.com/office/drawing/2014/main" id="{F1EDEF10-5531-8248-33E1-4809D8DB8005}"/>
-            </a:ext>
-          </a:extLst>
-        </p:cNvPr>
-        <p:cNvGrpSpPr/>
-        <p:nvPr/>
-      </p:nvGrpSpPr>
-      <p:grpSpPr>
-        <a:xfrm>
-          <a:off x="0" y="0"/>
-          <a:ext cx="0" cy="0"/>
-          <a:chOff x="0" y="0"/>
-          <a:chExt cx="0" cy="0"/>
-        </a:xfrm>
-      </p:grpSpPr>
-      <p:sp>
-        <p:nvSpPr>
-          <p:cNvPr id="2" name="Slide Image Placeholder 1">
-            <a:extLst>
-              <a:ext uri="{FF2B5EF4-FFF2-40B4-BE49-F238E27FC236}">
-                <a16:creationId xmlns:a16="http://schemas.microsoft.com/office/drawing/2014/main" id="{FFB38B50-17AC-38C6-BE82-A167E093AA22}"/>
-              </a:ext>
-            </a:extLst>
-          </p:cNvPr>
-          <p:cNvSpPr>
-            <a:spLocks noGrp="1" noRot="1" noChangeAspect="1"/>
-          </p:cNvSpPr>
-          <p:nvPr>
-            <p:ph type="sldImg"/>
-          </p:nvPr>
-        </p:nvSpPr>
-        <p:spPr/>
-      </p:sp>
-      <p:sp>
-        <p:nvSpPr>
-          <p:cNvPr id="3" name="Notes Placeholder 2">
-            <a:extLst>
-              <a:ext uri="{FF2B5EF4-FFF2-40B4-BE49-F238E27FC236}">
-                <a16:creationId xmlns:a16="http://schemas.microsoft.com/office/drawing/2014/main" id="{E8AC1DE8-8CE9-B47B-E133-A8C3276E4373}"/>
-              </a:ext>
-            </a:extLst>
-          </p:cNvPr>
-          <p:cNvSpPr>
-            <a:spLocks noGrp="1"/>
-          </p:cNvSpPr>
-          <p:nvPr>
-            <p:ph type="body" idx="1"/>
-          </p:nvPr>
-        </p:nvSpPr>
-        <p:spPr/>
-        <p:txBody>
-          <a:bodyPr/>
-          <a:lstStyle/>
-          <a:p>
-            <a:pPr marL="0" marR="0" lvl="0" indent="0" algn="l" defTabSz="914400" rtl="0" eaLnBrk="1" fontAlgn="auto" latinLnBrk="0" hangingPunct="1">
-              <a:lnSpc>
-                <a:spcPct val="100000"/>
-              </a:lnSpc>
-              <a:spcBef>
-                <a:spcPts val="0"/>
-              </a:spcBef>
-              <a:spcAft>
-                <a:spcPts val="0"/>
-              </a:spcAft>
-              <a:buClrTx/>
-              <a:buSzTx/>
-              <a:buFontTx/>
-              <a:buNone/>
-              <a:tabLst/>
-              <a:defRPr/>
-            </a:pPr>
-            <a:r>
-              <a:rPr lang="en-US" dirty="0"/>
-              <a:t>After a CMP/CMN or SUBS/ADDS used as an unsigned compare where the first operand is strictly greater than the second; for example, after CMP r0, r1, HI means r0 &gt; r1 when treated as unsigned.</a:t>
-            </a:r>
-          </a:p>
-          <a:p>
-            <a:endParaRPr lang="en-US" dirty="0"/>
-          </a:p>
-        </p:txBody>
-      </p:sp>
-      <p:sp>
-        <p:nvSpPr>
-          <p:cNvPr id="4" name="Slide Number Placeholder 3">
-            <a:extLst>
-              <a:ext uri="{FF2B5EF4-FFF2-40B4-BE49-F238E27FC236}">
-                <a16:creationId xmlns:a16="http://schemas.microsoft.com/office/drawing/2014/main" id="{158B5C0F-9341-5534-5F6A-552401C9267F}"/>
-              </a:ext>
-            </a:extLst>
-          </p:cNvPr>
-          <p:cNvSpPr>
-            <a:spLocks noGrp="1"/>
-          </p:cNvSpPr>
-          <p:nvPr>
-            <p:ph type="sldNum" sz="quarter" idx="5"/>
-          </p:nvPr>
-        </p:nvSpPr>
-        <p:spPr/>
-        <p:txBody>
-          <a:bodyPr/>
-          <a:lstStyle/>
-          <a:p>
-            <a:fld id="{2D71AD5F-E36F-46B9-A99B-7B025244359D}" type="slidenum">
-              <a:rPr lang="en-US" smtClean="0"/>
-              <a:pPr/>
-              <a:t>35</a:t>
-            </a:fld>
-            <a:endParaRPr lang="en-US"/>
-          </a:p>
-        </p:txBody>
-      </p:sp>
-    </p:spTree>
-    <p:extLst>
-      <p:ext uri="{BB962C8B-B14F-4D97-AF65-F5344CB8AC3E}">
-        <p14:creationId xmlns:p14="http://schemas.microsoft.com/office/powerpoint/2010/main" val="2365116434"/>
       </p:ext>
     </p:extLst>
   </p:cSld>
@@ -2665,6 +2642,138 @@
 </file>
 
 <file path=ppt/notesSlides/notesSlide20.xml><?xml version="1.0" encoding="utf-8"?>
+<p:notes xmlns:a="http://schemas.openxmlformats.org/drawingml/2006/main" xmlns:r="http://schemas.openxmlformats.org/officeDocument/2006/relationships" xmlns:p="http://schemas.openxmlformats.org/presentationml/2006/main">
+  <p:cSld>
+    <p:spTree>
+      <p:nvGrpSpPr>
+        <p:cNvPr id="1" name="">
+          <a:extLst>
+            <a:ext uri="{FF2B5EF4-FFF2-40B4-BE49-F238E27FC236}">
+              <a16:creationId xmlns:a16="http://schemas.microsoft.com/office/drawing/2014/main" id="{F1EDEF10-5531-8248-33E1-4809D8DB8005}"/>
+            </a:ext>
+          </a:extLst>
+        </p:cNvPr>
+        <p:cNvGrpSpPr/>
+        <p:nvPr/>
+      </p:nvGrpSpPr>
+      <p:grpSpPr>
+        <a:xfrm>
+          <a:off x="0" y="0"/>
+          <a:ext cx="0" cy="0"/>
+          <a:chOff x="0" y="0"/>
+          <a:chExt cx="0" cy="0"/>
+        </a:xfrm>
+      </p:grpSpPr>
+      <p:sp>
+        <p:nvSpPr>
+          <p:cNvPr id="2" name="Slide Image Placeholder 1">
+            <a:extLst>
+              <a:ext uri="{FF2B5EF4-FFF2-40B4-BE49-F238E27FC236}">
+                <a16:creationId xmlns:a16="http://schemas.microsoft.com/office/drawing/2014/main" id="{FFB38B50-17AC-38C6-BE82-A167E093AA22}"/>
+              </a:ext>
+            </a:extLst>
+          </p:cNvPr>
+          <p:cNvSpPr>
+            <a:spLocks noGrp="1" noRot="1" noChangeAspect="1"/>
+          </p:cNvSpPr>
+          <p:nvPr>
+            <p:ph type="sldImg"/>
+          </p:nvPr>
+        </p:nvSpPr>
+        <p:spPr/>
+      </p:sp>
+      <p:sp>
+        <p:nvSpPr>
+          <p:cNvPr id="3" name="Notes Placeholder 2">
+            <a:extLst>
+              <a:ext uri="{FF2B5EF4-FFF2-40B4-BE49-F238E27FC236}">
+                <a16:creationId xmlns:a16="http://schemas.microsoft.com/office/drawing/2014/main" id="{E8AC1DE8-8CE9-B47B-E133-A8C3276E4373}"/>
+              </a:ext>
+            </a:extLst>
+          </p:cNvPr>
+          <p:cNvSpPr>
+            <a:spLocks noGrp="1"/>
+          </p:cNvSpPr>
+          <p:nvPr>
+            <p:ph type="body" idx="1"/>
+          </p:nvPr>
+        </p:nvSpPr>
+        <p:spPr/>
+        <p:txBody>
+          <a:bodyPr/>
+          <a:lstStyle/>
+          <a:p>
+            <a:pPr marL="0" marR="0" lvl="0" indent="0" algn="l" defTabSz="914400" rtl="0" eaLnBrk="1" fontAlgn="auto" latinLnBrk="0" hangingPunct="1">
+              <a:lnSpc>
+                <a:spcPct val="100000"/>
+              </a:lnSpc>
+              <a:spcBef>
+                <a:spcPts val="0"/>
+              </a:spcBef>
+              <a:spcAft>
+                <a:spcPts val="0"/>
+              </a:spcAft>
+              <a:buClrTx/>
+              <a:buSzTx/>
+              <a:buFontTx/>
+              <a:buNone/>
+              <a:tabLst/>
+              <a:defRPr/>
+            </a:pPr>
+            <a:r>
+              <a:rPr lang="en-US" dirty="0"/>
+              <a:t>After a CMP/CMN or SUBS/ADDS used as an unsigned compare where the first operand is strictly greater than the second; for example, after CMP r0, r1, HI means r0 &gt; r1 when treated as unsigned.</a:t>
+            </a:r>
+          </a:p>
+          <a:p>
+            <a:endParaRPr lang="en-US" dirty="0"/>
+          </a:p>
+        </p:txBody>
+      </p:sp>
+      <p:sp>
+        <p:nvSpPr>
+          <p:cNvPr id="4" name="Slide Number Placeholder 3">
+            <a:extLst>
+              <a:ext uri="{FF2B5EF4-FFF2-40B4-BE49-F238E27FC236}">
+                <a16:creationId xmlns:a16="http://schemas.microsoft.com/office/drawing/2014/main" id="{158B5C0F-9341-5534-5F6A-552401C9267F}"/>
+              </a:ext>
+            </a:extLst>
+          </p:cNvPr>
+          <p:cNvSpPr>
+            <a:spLocks noGrp="1"/>
+          </p:cNvSpPr>
+          <p:nvPr>
+            <p:ph type="sldNum" sz="quarter" idx="5"/>
+          </p:nvPr>
+        </p:nvSpPr>
+        <p:spPr/>
+        <p:txBody>
+          <a:bodyPr/>
+          <a:lstStyle/>
+          <a:p>
+            <a:fld id="{2D71AD5F-E36F-46B9-A99B-7B025244359D}" type="slidenum">
+              <a:rPr lang="en-US" smtClean="0"/>
+              <a:pPr/>
+              <a:t>35</a:t>
+            </a:fld>
+            <a:endParaRPr lang="en-US"/>
+          </a:p>
+        </p:txBody>
+      </p:sp>
+    </p:spTree>
+    <p:extLst>
+      <p:ext uri="{BB962C8B-B14F-4D97-AF65-F5344CB8AC3E}">
+        <p14:creationId xmlns:p14="http://schemas.microsoft.com/office/powerpoint/2010/main" val="2365116434"/>
+      </p:ext>
+    </p:extLst>
+  </p:cSld>
+  <p:clrMapOvr>
+    <a:masterClrMapping/>
+  </p:clrMapOvr>
+</p:notes>
+</file>
+
+<file path=ppt/notesSlides/notesSlide21.xml><?xml version="1.0" encoding="utf-8"?>
 <p:notes xmlns:a="http://schemas.openxmlformats.org/drawingml/2006/main" xmlns:r="http://schemas.openxmlformats.org/officeDocument/2006/relationships" xmlns:p="http://schemas.openxmlformats.org/presentationml/2006/main">
   <p:cSld>
     <p:spTree>
@@ -3711,13 +3820,7 @@
   <p:cSld>
     <p:spTree>
       <p:nvGrpSpPr>
-        <p:cNvPr id="1" name="">
-          <a:extLst>
-            <a:ext uri="{FF2B5EF4-FFF2-40B4-BE49-F238E27FC236}">
-              <a16:creationId xmlns:a16="http://schemas.microsoft.com/office/drawing/2014/main" id="{661412AB-13B4-B035-0958-DA9C98290BE8}"/>
-            </a:ext>
-          </a:extLst>
-        </p:cNvPr>
+        <p:cNvPr id="1" name=""/>
         <p:cNvGrpSpPr/>
         <p:nvPr/>
       </p:nvGrpSpPr>
@@ -3731,13 +3834,7 @@
       </p:grpSpPr>
       <p:sp>
         <p:nvSpPr>
-          <p:cNvPr id="2" name="Slide Image Placeholder 1">
-            <a:extLst>
-              <a:ext uri="{FF2B5EF4-FFF2-40B4-BE49-F238E27FC236}">
-                <a16:creationId xmlns:a16="http://schemas.microsoft.com/office/drawing/2014/main" id="{9E6F495B-59BA-E964-8205-8317BD120C93}"/>
-              </a:ext>
-            </a:extLst>
-          </p:cNvPr>
+          <p:cNvPr id="2" name="Slide Image Placeholder 1"/>
           <p:cNvSpPr>
             <a:spLocks noGrp="1" noRot="1" noChangeAspect="1"/>
           </p:cNvSpPr>
@@ -3749,13 +3846,7 @@
       </p:sp>
       <p:sp>
         <p:nvSpPr>
-          <p:cNvPr id="3" name="Notes Placeholder 2">
-            <a:extLst>
-              <a:ext uri="{FF2B5EF4-FFF2-40B4-BE49-F238E27FC236}">
-                <a16:creationId xmlns:a16="http://schemas.microsoft.com/office/drawing/2014/main" id="{870832F4-7DCD-B8E4-7248-B122F9B2AC16}"/>
-              </a:ext>
-            </a:extLst>
-          </p:cNvPr>
+          <p:cNvPr id="3" name="Notes Placeholder 2"/>
           <p:cNvSpPr>
             <a:spLocks noGrp="1"/>
           </p:cNvSpPr>
@@ -3768,19 +3859,143 @@
           <a:bodyPr/>
           <a:lstStyle/>
           <a:p>
-            <a:endParaRPr lang="en-US" dirty="0"/>
+            <a:r>
+              <a:rPr lang="en-US" altLang="zh-CN" dirty="0"/>
+              <a:t>Loop runs for 9 iterations, not 10</a:t>
+            </a:r>
+          </a:p>
+          <a:p>
+            <a:r>
+              <a:rPr lang="en-US" altLang="zh-CN" sz="1200" b="1" i="0" kern="1200" dirty="0">
+                <a:solidFill>
+                  <a:schemeClr val="tx1"/>
+                </a:solidFill>
+                <a:effectLst/>
+                <a:latin typeface="+mn-lt"/>
+                <a:ea typeface="+mn-ea"/>
+                <a:cs typeface="+mn-cs"/>
+              </a:rPr>
+              <a:t>Option 1 (</a:t>
+            </a:r>
+            <a:r>
+              <a:rPr lang="en-US" altLang="zh-CN" sz="1200" b="0" i="0" kern="1200" dirty="0">
+                <a:solidFill>
+                  <a:schemeClr val="tx1"/>
+                </a:solidFill>
+                <a:effectLst/>
+                <a:latin typeface="+mn-lt"/>
+                <a:ea typeface="+mn-ea"/>
+                <a:cs typeface="+mn-cs"/>
+              </a:rPr>
+              <a:t>CMP r0, #11</a:t>
+            </a:r>
+            <a:r>
+              <a:rPr lang="en-US" altLang="zh-CN" sz="1200" b="1" i="0" kern="1200" dirty="0">
+                <a:solidFill>
+                  <a:schemeClr val="tx1"/>
+                </a:solidFill>
+                <a:effectLst/>
+                <a:latin typeface="+mn-lt"/>
+                <a:ea typeface="+mn-ea"/>
+                <a:cs typeface="+mn-cs"/>
+              </a:rPr>
+              <a:t>):</a:t>
+            </a:r>
+            <a:r>
+              <a:rPr lang="en-US" altLang="zh-CN" sz="1200" b="0" i="0" kern="1200" dirty="0">
+                <a:solidFill>
+                  <a:schemeClr val="tx1"/>
+                </a:solidFill>
+                <a:effectLst/>
+                <a:latin typeface="+mn-lt"/>
+                <a:ea typeface="+mn-ea"/>
+                <a:cs typeface="+mn-cs"/>
+              </a:rPr>
+              <a:t> By changing the comparison to 11 and keeping BEQ done, the loop will now execute when r0 is 10, and only exit when r0 finally increments to 11.</a:t>
+            </a:r>
+          </a:p>
+          <a:p>
+            <a:r>
+              <a:rPr lang="en-US" altLang="zh-CN" sz="1200" b="1" i="0" kern="1200">
+                <a:solidFill>
+                  <a:schemeClr val="tx1"/>
+                </a:solidFill>
+                <a:effectLst/>
+                <a:latin typeface="+mn-lt"/>
+                <a:ea typeface="+mn-ea"/>
+                <a:cs typeface="+mn-cs"/>
+              </a:rPr>
+              <a:t>Option 2 (</a:t>
+            </a:r>
+            <a:r>
+              <a:rPr lang="en-US" altLang="zh-CN" sz="1200" b="0" i="0" kern="1200">
+                <a:solidFill>
+                  <a:schemeClr val="tx1"/>
+                </a:solidFill>
+                <a:effectLst/>
+                <a:latin typeface="+mn-lt"/>
+                <a:ea typeface="+mn-ea"/>
+                <a:cs typeface="+mn-cs"/>
+              </a:rPr>
+              <a:t>BGT done</a:t>
+            </a:r>
+            <a:r>
+              <a:rPr lang="en-US" altLang="zh-CN" sz="1200" b="1" i="0" kern="1200">
+                <a:solidFill>
+                  <a:schemeClr val="tx1"/>
+                </a:solidFill>
+                <a:effectLst/>
+                <a:latin typeface="+mn-lt"/>
+                <a:ea typeface="+mn-ea"/>
+                <a:cs typeface="+mn-cs"/>
+              </a:rPr>
+              <a:t>):</a:t>
+            </a:r>
+            <a:r>
+              <a:rPr lang="en-US" altLang="zh-CN" sz="1200" b="0" i="0" kern="1200">
+                <a:solidFill>
+                  <a:schemeClr val="tx1"/>
+                </a:solidFill>
+                <a:effectLst/>
+                <a:latin typeface="+mn-lt"/>
+                <a:ea typeface="+mn-ea"/>
+                <a:cs typeface="+mn-cs"/>
+              </a:rPr>
+              <a:t> By keeping the comparison at 10 but changing the branch instruction to Branch if Greater Than (BGT), the loop will execute when r0 is 10 (since 10 is not </a:t>
+            </a:r>
+            <a:r>
+              <a:rPr lang="en-US" altLang="zh-CN" sz="1200" b="0" i="1" kern="1200">
+                <a:solidFill>
+                  <a:schemeClr val="tx1"/>
+                </a:solidFill>
+                <a:effectLst/>
+                <a:latin typeface="+mn-lt"/>
+                <a:ea typeface="+mn-ea"/>
+                <a:cs typeface="+mn-cs"/>
+              </a:rPr>
+              <a:t>greater</a:t>
+            </a:r>
+            <a:r>
+              <a:rPr lang="en-US" altLang="zh-CN" sz="1200" b="0" i="0" kern="1200">
+                <a:solidFill>
+                  <a:schemeClr val="tx1"/>
+                </a:solidFill>
+                <a:effectLst/>
+                <a:latin typeface="+mn-lt"/>
+                <a:ea typeface="+mn-ea"/>
+                <a:cs typeface="+mn-cs"/>
+              </a:rPr>
+              <a:t> than 10) and will only branch out when r0 hits 11.</a:t>
+            </a:r>
+          </a:p>
+          <a:p>
+            <a:endParaRPr lang="zh-CN" altLang="en-US" dirty="0"/>
           </a:p>
         </p:txBody>
       </p:sp>
       <p:sp>
         <p:nvSpPr>
-          <p:cNvPr id="4" name="Slide Number Placeholder 3">
-            <a:extLst>
-              <a:ext uri="{FF2B5EF4-FFF2-40B4-BE49-F238E27FC236}">
-                <a16:creationId xmlns:a16="http://schemas.microsoft.com/office/drawing/2014/main" id="{F7B25462-90E1-D5A5-988E-2D33F273D747}"/>
-              </a:ext>
-            </a:extLst>
-          </p:cNvPr>
+          <p:cNvPr id="4" name="Slide Number Placeholder 3"/>
           <p:cNvSpPr>
             <a:spLocks noGrp="1"/>
           </p:cNvSpPr>
@@ -3796,7 +4011,7 @@
             <a:fld id="{2D71AD5F-E36F-46B9-A99B-7B025244359D}" type="slidenum">
               <a:rPr lang="en-US" smtClean="0"/>
               <a:pPr/>
-              <a:t>17</a:t>
+              <a:t>14</a:t>
             </a:fld>
             <a:endParaRPr lang="en-US"/>
           </a:p>
@@ -3805,7 +4020,7 @@
     </p:spTree>
     <p:extLst>
       <p:ext uri="{BB962C8B-B14F-4D97-AF65-F5344CB8AC3E}">
-        <p14:creationId xmlns:p14="http://schemas.microsoft.com/office/powerpoint/2010/main" val="3133580365"/>
+        <p14:creationId xmlns:p14="http://schemas.microsoft.com/office/powerpoint/2010/main" val="3765258519"/>
       </p:ext>
     </p:extLst>
   </p:cSld>
@@ -3958,7 +4173,7 @@
             <a:fld id="{2E26774B-6488-4259-9342-6CBDB2BFD4E4}" type="datetime1">
               <a:rPr lang="en-US" smtClean="0"/>
               <a:pPr eaLnBrk="1" latinLnBrk="0" hangingPunct="1"/>
-              <a:t>12/3/2025</a:t>
+              <a:t>4/9/2026</a:t>
             </a:fld>
             <a:endParaRPr lang="en-US" sz="1600" dirty="0"/>
           </a:p>
@@ -4319,7 +4534,7 @@
             <a:fld id="{9B2E7711-0BE3-4AFC-959B-CB5C31A7AE48}" type="datetime1">
               <a:rPr lang="en-US" smtClean="0"/>
               <a:pPr eaLnBrk="1" latinLnBrk="0" hangingPunct="1"/>
-              <a:t>12/3/2025</a:t>
+              <a:t>4/9/2026</a:t>
             </a:fld>
             <a:endParaRPr lang="en-US"/>
           </a:p>
@@ -4496,7 +4711,7 @@
             <a:fld id="{825AAB62-A572-4E37-B772-B4A75ADE0B18}" type="datetime1">
               <a:rPr lang="en-US" smtClean="0"/>
               <a:pPr eaLnBrk="1" latinLnBrk="0" hangingPunct="1"/>
-              <a:t>12/3/2025</a:t>
+              <a:t>4/9/2026</a:t>
             </a:fld>
             <a:endParaRPr lang="en-US"/>
           </a:p>
@@ -4733,7 +4948,7 @@
             <a:fld id="{B0F52420-10F8-488E-969A-A9BE388BE9C4}" type="datetime1">
               <a:rPr lang="en-US" smtClean="0"/>
               <a:pPr eaLnBrk="1" latinLnBrk="0" hangingPunct="1"/>
-              <a:t>12/3/2025</a:t>
+              <a:t>4/9/2026</a:t>
             </a:fld>
             <a:endParaRPr lang="en-US" dirty="0"/>
           </a:p>
@@ -5004,7 +5219,7 @@
             <a:fld id="{96E96F24-58CF-47DA-907C-A9CD6353E425}" type="datetime1">
               <a:rPr lang="en-US" smtClean="0"/>
               <a:pPr eaLnBrk="1" latinLnBrk="0" hangingPunct="1"/>
-              <a:t>12/3/2025</a:t>
+              <a:t>4/9/2026</a:t>
             </a:fld>
             <a:endParaRPr lang="en-US" dirty="0"/>
           </a:p>
@@ -5226,7 +5441,7 @@
             <a:fld id="{53AE4463-726A-4A35-9F46-98893432A3F9}" type="datetime1">
               <a:rPr lang="en-US" smtClean="0"/>
               <a:pPr eaLnBrk="1" latinLnBrk="0" hangingPunct="1"/>
-              <a:t>12/3/2025</a:t>
+              <a:t>4/9/2026</a:t>
             </a:fld>
             <a:endParaRPr lang="en-US"/>
           </a:p>
@@ -5580,7 +5795,7 @@
             <a:fld id="{FDF404D0-E306-4E90-90E3-E44D26246FFC}" type="datetime1">
               <a:rPr lang="en-US" smtClean="0"/>
               <a:pPr eaLnBrk="1" latinLnBrk="0" hangingPunct="1"/>
-              <a:t>12/3/2025</a:t>
+              <a:t>4/9/2026</a:t>
             </a:fld>
             <a:endParaRPr lang="en-US"/>
           </a:p>
@@ -5814,7 +6029,7 @@
             <a:fld id="{1485DA14-76F0-4D93-83FB-7878C79A1986}" type="datetime1">
               <a:rPr lang="en-US" smtClean="0"/>
               <a:pPr eaLnBrk="1" latinLnBrk="0" hangingPunct="1"/>
-              <a:t>12/3/2025</a:t>
+              <a:t>4/9/2026</a:t>
             </a:fld>
             <a:endParaRPr lang="en-US"/>
           </a:p>
@@ -5957,7 +6172,7 @@
             <a:fld id="{A15E552D-49E1-496B-B79C-E100986B8B5F}" type="datetime1">
               <a:rPr lang="en-US" smtClean="0"/>
               <a:pPr eaLnBrk="1" latinLnBrk="0" hangingPunct="1"/>
-              <a:t>12/3/2025</a:t>
+              <a:t>4/9/2026</a:t>
             </a:fld>
             <a:endParaRPr lang="en-US"/>
           </a:p>
@@ -6236,7 +6451,7 @@
             <a:fld id="{CEC72505-1551-4A98-97CD-F520B07184AD}" type="datetime1">
               <a:rPr lang="en-US" smtClean="0"/>
               <a:pPr eaLnBrk="1" latinLnBrk="0" hangingPunct="1"/>
-              <a:t>12/3/2025</a:t>
+              <a:t>4/9/2026</a:t>
             </a:fld>
             <a:endParaRPr lang="en-US"/>
           </a:p>
@@ -6644,7 +6859,7 @@
             <a:fld id="{7218F47B-BA16-4F20-B5BA-73F598D94B51}" type="datetime1">
               <a:rPr lang="en-US" smtClean="0"/>
               <a:pPr eaLnBrk="1" latinLnBrk="0" hangingPunct="1"/>
-              <a:t>12/3/2025</a:t>
+              <a:t>4/9/2026</a:t>
             </a:fld>
             <a:endParaRPr lang="en-US"/>
           </a:p>
@@ -6983,7 +7198,7 @@
             <a:fld id="{4F3CB514-9CA6-4E48-9463-A430D31CFDE3}" type="datetime1">
               <a:rPr lang="en-US" smtClean="0"/>
               <a:pPr eaLnBrk="1" latinLnBrk="0" hangingPunct="1"/>
-              <a:t>12/3/2025</a:t>
+              <a:t>4/9/2026</a:t>
             </a:fld>
             <a:endParaRPr lang="en-US" sz="1400" dirty="0">
               <a:solidFill>
@@ -10396,8 +10611,33 @@
           <a:p>
             <a:r>
               <a:rPr lang="en-US" dirty="0"/>
-              <a:t>C to Assembly: What is wrong? ANS: Loop runs for 9 iterations, not 10</a:t>
-            </a:r>
+              <a:t>C to Assembly: What is wrong? ANS </a:t>
+            </a:r>
+            <a:r>
+              <a:rPr lang="en-US" altLang="zh-CN" dirty="0"/>
+              <a:t>(</a:t>
+            </a:r>
+            <a:r>
+              <a:rPr lang="en-US" altLang="zh-CN" dirty="0" err="1"/>
+              <a:t>cnt</a:t>
+            </a:r>
+            <a:r>
+              <a:rPr lang="en-US" altLang="zh-CN" dirty="0"/>
+              <a:t> declared as </a:t>
+            </a:r>
+            <a:r>
+              <a:rPr lang="en-US" altLang="zh-CN" dirty="0">
+                <a:solidFill>
+                  <a:srgbClr val="C00000"/>
+                </a:solidFill>
+              </a:rPr>
+              <a:t>signed int</a:t>
+            </a:r>
+            <a:r>
+              <a:rPr lang="en-US" altLang="zh-CN" dirty="0"/>
+              <a:t>)</a:t>
+            </a:r>
+            <a:endParaRPr lang="en-US" dirty="0"/>
           </a:p>
         </p:txBody>
       </p:sp>
@@ -10446,13 +10686,13 @@
           <p:nvPr>
             <p:extLst>
               <p:ext uri="{D42A27DB-BD31-4B8C-83A1-F6EECF244321}">
-                <p14:modId xmlns:p14="http://schemas.microsoft.com/office/powerpoint/2010/main" val="3298462279"/>
+                <p14:modId xmlns:p14="http://schemas.microsoft.com/office/powerpoint/2010/main" val="3647185290"/>
               </p:ext>
             </p:extLst>
           </p:nvPr>
         </p:nvGraphicFramePr>
         <p:xfrm>
-          <a:off x="457200" y="1219200"/>
+          <a:off x="551329" y="2362200"/>
           <a:ext cx="8153400" cy="2099734"/>
         </p:xfrm>
         <a:graphic>
@@ -10500,7 +10740,7 @@
                           <a:latin typeface="Consolas" panose="020B0609020204030204" pitchFamily="49" charset="0"/>
                           <a:cs typeface="Consolas" panose="020B0609020204030204" pitchFamily="49" charset="0"/>
                         </a:rPr>
-                        <a:t>C Program</a:t>
+                        <a:t>C Program (int)</a:t>
                       </a:r>
                       <a:endParaRPr lang="en-US" sz="1600" dirty="0">
                         <a:solidFill>
@@ -10541,7 +10781,7 @@
                           <a:latin typeface="Consolas" panose="020B0609020204030204" pitchFamily="49" charset="0"/>
                           <a:cs typeface="Consolas" panose="020B0609020204030204" pitchFamily="49" charset="0"/>
                         </a:rPr>
-                        <a:t>Assembly Program</a:t>
+                        <a:t>Assembly Program 1</a:t>
                       </a:r>
                       <a:endParaRPr lang="en-US" sz="1600" dirty="0">
                         <a:solidFill>
@@ -10957,9 +11197,73 @@
           </a:graphicData>
         </a:graphic>
       </p:graphicFrame>
+      <p:sp>
+        <p:nvSpPr>
+          <p:cNvPr id="4" name="Content Placeholder 3">
+            <a:extLst>
+              <a:ext uri="{FF2B5EF4-FFF2-40B4-BE49-F238E27FC236}">
+                <a16:creationId xmlns:a16="http://schemas.microsoft.com/office/drawing/2014/main" id="{205EDA7E-8E91-D270-9D52-298E05FE9ECB}"/>
+              </a:ext>
+            </a:extLst>
+          </p:cNvPr>
+          <p:cNvSpPr>
+            <a:spLocks noGrp="1"/>
+          </p:cNvSpPr>
+          <p:nvPr>
+            <p:ph sz="quarter" idx="1"/>
+          </p:nvPr>
+        </p:nvSpPr>
+        <p:spPr>
+          <a:xfrm>
+            <a:off x="457200" y="1143000"/>
+            <a:ext cx="8229600" cy="1371600"/>
+          </a:xfrm>
+        </p:spPr>
+        <p:txBody>
+          <a:bodyPr>
+            <a:normAutofit fontScale="92500"/>
+          </a:bodyPr>
+          <a:lstStyle/>
+          <a:p>
+            <a:r>
+              <a:rPr lang="en-US" altLang="zh-CN" sz="1400" dirty="0"/>
+              <a:t>The loop checks CMP r0, #10 and exits immediately if they are equal (BEQ end). Because it exits </a:t>
+            </a:r>
+            <a:r>
+              <a:rPr lang="en-US" altLang="zh-CN" sz="1400" i="1" dirty="0"/>
+              <a:t>before</a:t>
+            </a:r>
+            <a:r>
+              <a:rPr lang="en-US" altLang="zh-CN" sz="1400" dirty="0"/>
+              <a:t> executing the loop body when </a:t>
+            </a:r>
+            <a:r>
+              <a:rPr lang="en-US" altLang="zh-CN" sz="1400" dirty="0" err="1"/>
+              <a:t>cnt</a:t>
+            </a:r>
+            <a:r>
+              <a:rPr lang="en-US" altLang="zh-CN" sz="1400" dirty="0"/>
+              <a:t> == 10, the loop body only executes for 9 iterations, r0 values 1 through 9.</a:t>
+            </a:r>
+          </a:p>
+          <a:p>
+            <a:r>
+              <a:rPr lang="en-US" altLang="zh-CN" sz="1400" dirty="0"/>
+              <a:t>Option 1: Compare against 11: CMP r0, #11 and branch on equal BEQ end.</a:t>
+            </a:r>
+          </a:p>
+          <a:p>
+            <a:r>
+              <a:rPr lang="en-US" altLang="zh-CN" sz="1400" dirty="0"/>
+              <a:t>Option 2: Keep the comparison with 10 but change the branch logic to branch out if greater than 10: BGT end.</a:t>
+            </a:r>
+            <a:endParaRPr lang="zh-CN" altLang="en-US" sz="1400" dirty="0"/>
+          </a:p>
+        </p:txBody>
+      </p:sp>
       <p:graphicFrame>
         <p:nvGraphicFramePr>
-          <p:cNvPr id="8" name="Table 7">
+          <p:cNvPr id="6" name="Table 5">
             <a:extLst>
               <a:ext uri="{FF2B5EF4-FFF2-40B4-BE49-F238E27FC236}">
                 <a16:creationId xmlns:a16="http://schemas.microsoft.com/office/drawing/2014/main" id="{B13248B5-A9EA-67F6-3118-C1F6BE8436B6}"/>
@@ -10972,13 +11276,13 @@
           <p:nvPr>
             <p:extLst>
               <p:ext uri="{D42A27DB-BD31-4B8C-83A1-F6EECF244321}">
-                <p14:modId xmlns:p14="http://schemas.microsoft.com/office/powerpoint/2010/main" val="1243319294"/>
+                <p14:modId xmlns:p14="http://schemas.microsoft.com/office/powerpoint/2010/main" val="3628730611"/>
               </p:ext>
             </p:extLst>
           </p:nvPr>
         </p:nvGraphicFramePr>
         <p:xfrm>
-          <a:off x="457200" y="3962400"/>
+          <a:off x="551329" y="4515722"/>
           <a:ext cx="8153400" cy="2099734"/>
         </p:xfrm>
         <a:graphic>
@@ -11026,7 +11330,18 @@
                           <a:latin typeface="Consolas" panose="020B0609020204030204" pitchFamily="49" charset="0"/>
                           <a:cs typeface="Consolas" panose="020B0609020204030204" pitchFamily="49" charset="0"/>
                         </a:rPr>
-                        <a:t>C Program</a:t>
+                        <a:t>C Program </a:t>
+                      </a:r>
+                      <a:r>
+                        <a:rPr lang="en-US" altLang="zh-CN" sz="1600" dirty="0">
+                          <a:solidFill>
+                            <a:schemeClr val="bg1"/>
+                          </a:solidFill>
+                          <a:effectLst/>
+                          <a:latin typeface="Consolas" panose="020B0609020204030204" pitchFamily="49" charset="0"/>
+                          <a:cs typeface="Consolas" panose="020B0609020204030204" pitchFamily="49" charset="0"/>
+                        </a:rPr>
+                        <a:t>(int)</a:t>
                       </a:r>
                       <a:endParaRPr lang="en-US" sz="1600" dirty="0">
                         <a:solidFill>
@@ -11067,7 +11382,7 @@
                           <a:latin typeface="Consolas" panose="020B0609020204030204" pitchFamily="49" charset="0"/>
                           <a:cs typeface="Consolas" panose="020B0609020204030204" pitchFamily="49" charset="0"/>
                         </a:rPr>
-                        <a:t>Assembly Program</a:t>
+                        <a:t>Assembly Program 2</a:t>
                       </a:r>
                       <a:endParaRPr lang="en-US" sz="1600" dirty="0">
                         <a:solidFill>
@@ -11537,12 +11852,34 @@
         </p:nvSpPr>
         <p:spPr/>
         <p:txBody>
-          <a:bodyPr/>
+          <a:bodyPr>
+            <a:normAutofit fontScale="90000"/>
+          </a:bodyPr>
           <a:lstStyle/>
           <a:p>
             <a:r>
               <a:rPr lang="en-US" dirty="0"/>
-              <a:t>C to Assembly: What is wrong? ANS 2</a:t>
+              <a:t>C to Assembly: What is wrong? ANS (</a:t>
+            </a:r>
+            <a:r>
+              <a:rPr lang="en-US" dirty="0" err="1"/>
+              <a:t>cnt</a:t>
+            </a:r>
+            <a:r>
+              <a:rPr lang="en-US" dirty="0"/>
+              <a:t> declared as </a:t>
+            </a:r>
+            <a:r>
+              <a:rPr lang="en-US" dirty="0">
+                <a:solidFill>
+                  <a:srgbClr val="C00000"/>
+                </a:solidFill>
+              </a:rPr>
+              <a:t>unsigned int</a:t>
+            </a:r>
+            <a:r>
+              <a:rPr lang="en-US" dirty="0"/>
+              <a:t>)</a:t>
             </a:r>
           </a:p>
         </p:txBody>
@@ -11592,7 +11929,7 @@
           <p:nvPr>
             <p:extLst>
               <p:ext uri="{D42A27DB-BD31-4B8C-83A1-F6EECF244321}">
-                <p14:modId xmlns:p14="http://schemas.microsoft.com/office/powerpoint/2010/main" val="3748756956"/>
+                <p14:modId xmlns:p14="http://schemas.microsoft.com/office/powerpoint/2010/main" val="4262713325"/>
               </p:ext>
             </p:extLst>
           </p:nvPr>
@@ -11646,7 +11983,40 @@
                           <a:latin typeface="Consolas" panose="020B0609020204030204" pitchFamily="49" charset="0"/>
                           <a:cs typeface="Consolas" panose="020B0609020204030204" pitchFamily="49" charset="0"/>
                         </a:rPr>
-                        <a:t>C Program</a:t>
+                        <a:t>C Program </a:t>
+                      </a:r>
+                      <a:r>
+                        <a:rPr lang="en-US" altLang="zh-CN" sz="1600" dirty="0">
+                          <a:solidFill>
+                            <a:schemeClr val="bg1"/>
+                          </a:solidFill>
+                          <a:effectLst/>
+                          <a:latin typeface="Consolas" panose="020B0609020204030204" pitchFamily="49" charset="0"/>
+                          <a:cs typeface="Consolas" panose="020B0609020204030204" pitchFamily="49" charset="0"/>
+                        </a:rPr>
+                        <a:t>(</a:t>
+                      </a:r>
+                      <a:r>
+                        <a:rPr lang="en-US" altLang="zh-CN" sz="1600" dirty="0" err="1">
+                          <a:solidFill>
+                            <a:schemeClr val="bg1"/>
+                          </a:solidFill>
+                          <a:effectLst/>
+                          <a:latin typeface="Consolas" panose="020B0609020204030204" pitchFamily="49" charset="0"/>
+                          <a:cs typeface="Consolas" panose="020B0609020204030204" pitchFamily="49" charset="0"/>
+                        </a:rPr>
+                        <a:t>uint</a:t>
+                      </a:r>
+                      <a:r>
+                        <a:rPr lang="en-US" altLang="zh-CN" sz="1600" dirty="0">
+                          <a:solidFill>
+                            <a:schemeClr val="bg1"/>
+                          </a:solidFill>
+                          <a:effectLst/>
+                          <a:latin typeface="Consolas" panose="020B0609020204030204" pitchFamily="49" charset="0"/>
+                          <a:cs typeface="Consolas" panose="020B0609020204030204" pitchFamily="49" charset="0"/>
+                        </a:rPr>
+                        <a:t>)</a:t>
                       </a:r>
                       <a:endParaRPr lang="en-US" sz="1600" dirty="0">
                         <a:solidFill>
@@ -12130,7 +12500,7 @@
           <p:nvPr>
             <p:extLst>
               <p:ext uri="{D42A27DB-BD31-4B8C-83A1-F6EECF244321}">
-                <p14:modId xmlns:p14="http://schemas.microsoft.com/office/powerpoint/2010/main" val="3550534943"/>
+                <p14:modId xmlns:p14="http://schemas.microsoft.com/office/powerpoint/2010/main" val="2313611172"/>
               </p:ext>
             </p:extLst>
           </p:nvPr>
@@ -12184,7 +12554,40 @@
                           <a:latin typeface="Consolas" panose="020B0609020204030204" pitchFamily="49" charset="0"/>
                           <a:cs typeface="Consolas" panose="020B0609020204030204" pitchFamily="49" charset="0"/>
                         </a:rPr>
-                        <a:t>C Program</a:t>
+                        <a:t>C Program </a:t>
+                      </a:r>
+                      <a:r>
+                        <a:rPr lang="en-US" altLang="zh-CN" sz="1600" dirty="0">
+                          <a:solidFill>
+                            <a:schemeClr val="bg1"/>
+                          </a:solidFill>
+                          <a:effectLst/>
+                          <a:latin typeface="Consolas" panose="020B0609020204030204" pitchFamily="49" charset="0"/>
+                          <a:cs typeface="Consolas" panose="020B0609020204030204" pitchFamily="49" charset="0"/>
+                        </a:rPr>
+                        <a:t>(</a:t>
+                      </a:r>
+                      <a:r>
+                        <a:rPr lang="en-US" altLang="zh-CN" sz="1600" dirty="0" err="1">
+                          <a:solidFill>
+                            <a:schemeClr val="bg1"/>
+                          </a:solidFill>
+                          <a:effectLst/>
+                          <a:latin typeface="Consolas" panose="020B0609020204030204" pitchFamily="49" charset="0"/>
+                          <a:cs typeface="Consolas" panose="020B0609020204030204" pitchFamily="49" charset="0"/>
+                        </a:rPr>
+                        <a:t>uint</a:t>
+                      </a:r>
+                      <a:r>
+                        <a:rPr lang="en-US" altLang="zh-CN" sz="1600" dirty="0">
+                          <a:solidFill>
+                            <a:schemeClr val="bg1"/>
+                          </a:solidFill>
+                          <a:effectLst/>
+                          <a:latin typeface="Consolas" panose="020B0609020204030204" pitchFamily="49" charset="0"/>
+                          <a:cs typeface="Consolas" panose="020B0609020204030204" pitchFamily="49" charset="0"/>
+                        </a:rPr>
+                        <a:t>)</a:t>
                       </a:r>
                       <a:endParaRPr lang="en-US" sz="1600" dirty="0">
                         <a:solidFill>
@@ -12685,7 +13088,7 @@
         <p:cNvPr id="1" name="">
           <a:extLst>
             <a:ext uri="{FF2B5EF4-FFF2-40B4-BE49-F238E27FC236}">
-              <a16:creationId xmlns:a16="http://schemas.microsoft.com/office/drawing/2014/main" id="{8B14DB7C-94FB-4EAB-5C24-EE895CFDC78B}"/>
+              <a16:creationId xmlns:a16="http://schemas.microsoft.com/office/drawing/2014/main" id="{0344E425-B5DA-C69E-7063-C29F8FC295BD}"/>
             </a:ext>
           </a:extLst>
         </p:cNvPr>
@@ -12705,7 +13108,7 @@
           <p:cNvPr id="2" name="Title 1">
             <a:extLst>
               <a:ext uri="{FF2B5EF4-FFF2-40B4-BE49-F238E27FC236}">
-                <a16:creationId xmlns:a16="http://schemas.microsoft.com/office/drawing/2014/main" id="{259B03CD-87A7-F950-AF41-B756493D86E0}"/>
+                <a16:creationId xmlns:a16="http://schemas.microsoft.com/office/drawing/2014/main" id="{7E34E812-A261-B631-594F-6BE9D79EF84A}"/>
               </a:ext>
             </a:extLst>
           </p:cNvPr>
@@ -12723,8 +13126,13 @@
           <a:p>
             <a:r>
               <a:rPr lang="en-US" dirty="0"/>
-              <a:t>C to Assembly: What is wrong? ANS</a:t>
-            </a:r>
+              <a:t>C to Assembly: What is wrong? </a:t>
+            </a:r>
+            <a:r>
+              <a:rPr lang="en-US" altLang="zh-CN" dirty="0"/>
+              <a:t>ANS</a:t>
+            </a:r>
+            <a:endParaRPr lang="en-US" dirty="0"/>
           </a:p>
         </p:txBody>
       </p:sp>
@@ -12733,7 +13141,7 @@
           <p:cNvPr id="3" name="Slide Number Placeholder 2">
             <a:extLst>
               <a:ext uri="{FF2B5EF4-FFF2-40B4-BE49-F238E27FC236}">
-                <a16:creationId xmlns:a16="http://schemas.microsoft.com/office/drawing/2014/main" id="{66BCCBDF-9851-CFA5-A737-43CC6D68FF25}"/>
+                <a16:creationId xmlns:a16="http://schemas.microsoft.com/office/drawing/2014/main" id="{182928FF-A2D1-043A-2637-6F445ECC5650}"/>
               </a:ext>
             </a:extLst>
           </p:cNvPr>
@@ -12763,7 +13171,7 @@
           <p:cNvPr id="6" name="Table 5">
             <a:extLst>
               <a:ext uri="{FF2B5EF4-FFF2-40B4-BE49-F238E27FC236}">
-                <a16:creationId xmlns:a16="http://schemas.microsoft.com/office/drawing/2014/main" id="{80B7468F-F6CD-9D27-E99A-40FA8CBFEBA2}"/>
+                <a16:creationId xmlns:a16="http://schemas.microsoft.com/office/drawing/2014/main" id="{7F2F7753-A83D-ABF3-D334-31D349B3E0ED}"/>
               </a:ext>
             </a:extLst>
           </p:cNvPr>
@@ -12773,13 +13181,13 @@
           <p:nvPr>
             <p:extLst>
               <p:ext uri="{D42A27DB-BD31-4B8C-83A1-F6EECF244321}">
-                <p14:modId xmlns:p14="http://schemas.microsoft.com/office/powerpoint/2010/main" val="1154708528"/>
+                <p14:modId xmlns:p14="http://schemas.microsoft.com/office/powerpoint/2010/main" val="1858577818"/>
               </p:ext>
             </p:extLst>
           </p:nvPr>
         </p:nvGraphicFramePr>
         <p:xfrm>
-          <a:off x="432318" y="2133600"/>
+          <a:off x="457200" y="1333500"/>
           <a:ext cx="8153400" cy="1950720"/>
         </p:xfrm>
         <a:graphic>
@@ -13051,6 +13459,387 @@
                       </a:pPr>
                       <a:r>
                         <a:rPr lang="en-US" sz="1600" i="0" dirty="0">
+                          <a:effectLst/>
+                          <a:latin typeface="Consolas" panose="020B0609020204030204" pitchFamily="49" charset="0"/>
+                          <a:cs typeface="Consolas" panose="020B0609020204030204" pitchFamily="49" charset="0"/>
+                        </a:rPr>
+                        <a:t>loop: SUB r0, r0, #1 ; </a:t>
+                      </a:r>
+                      <a:r>
+                        <a:rPr lang="en-US" sz="1600" i="0" dirty="0" err="1">
+                          <a:effectLst/>
+                          <a:latin typeface="Consolas" panose="020B0609020204030204" pitchFamily="49" charset="0"/>
+                          <a:cs typeface="Consolas" panose="020B0609020204030204" pitchFamily="49" charset="0"/>
+                        </a:rPr>
+                        <a:t>cnt</a:t>
+                      </a:r>
+                      <a:r>
+                        <a:rPr lang="en-US" sz="1600" i="0" dirty="0">
+                          <a:effectLst/>
+                          <a:latin typeface="Consolas" panose="020B0609020204030204" pitchFamily="49" charset="0"/>
+                          <a:cs typeface="Consolas" panose="020B0609020204030204" pitchFamily="49" charset="0"/>
+                        </a:rPr>
+                        <a:t>--;ss</a:t>
+                      </a:r>
+                    </a:p>
+                    <a:p>
+                      <a:pPr marL="0" marR="0" algn="just">
+                        <a:spcBef>
+                          <a:spcPts val="0"/>
+                        </a:spcBef>
+                        <a:spcAft>
+                          <a:spcPts val="0"/>
+                        </a:spcAft>
+                      </a:pPr>
+                      <a:r>
+                        <a:rPr lang="en-US" sz="1600" i="0" dirty="0">
+                          <a:effectLst/>
+                          <a:latin typeface="Consolas" panose="020B0609020204030204" pitchFamily="49" charset="0"/>
+                          <a:cs typeface="Consolas" panose="020B0609020204030204" pitchFamily="49" charset="0"/>
+                        </a:rPr>
+                        <a:t>      BNE  loop    ; repeat until </a:t>
+                      </a:r>
+                      <a:r>
+                        <a:rPr lang="en-US" sz="1600" i="0" dirty="0" err="1">
+                          <a:effectLst/>
+                          <a:latin typeface="Consolas" panose="020B0609020204030204" pitchFamily="49" charset="0"/>
+                          <a:cs typeface="Consolas" panose="020B0609020204030204" pitchFamily="49" charset="0"/>
+                        </a:rPr>
+                        <a:t>cnt</a:t>
+                      </a:r>
+                      <a:r>
+                        <a:rPr lang="en-US" sz="1600" i="0" dirty="0">
+                          <a:effectLst/>
+                          <a:latin typeface="Consolas" panose="020B0609020204030204" pitchFamily="49" charset="0"/>
+                          <a:cs typeface="Consolas" panose="020B0609020204030204" pitchFamily="49" charset="0"/>
+                        </a:rPr>
+                        <a:t> == 0 (10 times)</a:t>
+                      </a:r>
+                    </a:p>
+                    <a:p>
+                      <a:pPr marL="0" marR="0" algn="just">
+                        <a:spcBef>
+                          <a:spcPts val="0"/>
+                        </a:spcBef>
+                        <a:spcAft>
+                          <a:spcPts val="0"/>
+                        </a:spcAft>
+                      </a:pPr>
+                      <a:r>
+                        <a:rPr lang="en-US" sz="1600" i="0" dirty="0">
+                          <a:effectLst/>
+                          <a:latin typeface="Consolas" panose="020B0609020204030204" pitchFamily="49" charset="0"/>
+                          <a:cs typeface="Consolas" panose="020B0609020204030204" pitchFamily="49" charset="0"/>
+                        </a:rPr>
+                        <a:t>done:</a:t>
+                      </a:r>
+                    </a:p>
+                  </a:txBody>
+                  <a:tcPr marL="68580" marR="68580" marT="0" marB="0"/>
+                </a:tc>
+                <a:extLst>
+                  <a:ext uri="{0D108BD9-81ED-4DB2-BD59-A6C34878D82A}">
+                    <a16:rowId xmlns:a16="http://schemas.microsoft.com/office/drawing/2014/main" val="10001"/>
+                  </a:ext>
+                </a:extLst>
+              </a:tr>
+            </a:tbl>
+          </a:graphicData>
+        </a:graphic>
+      </p:graphicFrame>
+      <p:graphicFrame>
+        <p:nvGraphicFramePr>
+          <p:cNvPr id="4" name="Table 3">
+            <a:extLst>
+              <a:ext uri="{FF2B5EF4-FFF2-40B4-BE49-F238E27FC236}">
+                <a16:creationId xmlns:a16="http://schemas.microsoft.com/office/drawing/2014/main" id="{80B7468F-F6CD-9D27-E99A-40FA8CBFEBA2}"/>
+              </a:ext>
+            </a:extLst>
+          </p:cNvPr>
+          <p:cNvGraphicFramePr>
+            <a:graphicFrameLocks noGrp="1"/>
+          </p:cNvGraphicFramePr>
+          <p:nvPr>
+            <p:extLst>
+              <p:ext uri="{D42A27DB-BD31-4B8C-83A1-F6EECF244321}">
+                <p14:modId xmlns:p14="http://schemas.microsoft.com/office/powerpoint/2010/main" val="480656205"/>
+              </p:ext>
+            </p:extLst>
+          </p:nvPr>
+        </p:nvGraphicFramePr>
+        <p:xfrm>
+          <a:off x="457200" y="3383280"/>
+          <a:ext cx="8153400" cy="1950720"/>
+        </p:xfrm>
+        <a:graphic>
+          <a:graphicData uri="http://schemas.openxmlformats.org/drawingml/2006/table">
+            <a:tbl>
+              <a:tblPr firstRow="1" firstCol="1" bandRow="1">
+                <a:tableStyleId>{5940675A-B579-460E-94D1-54222C63F5DA}</a:tableStyleId>
+              </a:tblPr>
+              <a:tblGrid>
+                <a:gridCol w="2057400">
+                  <a:extLst>
+                    <a:ext uri="{9D8B030D-6E8A-4147-A177-3AD203B41FA5}">
+                      <a16:colId xmlns:a16="http://schemas.microsoft.com/office/drawing/2014/main" val="20000"/>
+                    </a:ext>
+                  </a:extLst>
+                </a:gridCol>
+                <a:gridCol w="6096000">
+                  <a:extLst>
+                    <a:ext uri="{9D8B030D-6E8A-4147-A177-3AD203B41FA5}">
+                      <a16:colId xmlns:a16="http://schemas.microsoft.com/office/drawing/2014/main" val="20001"/>
+                    </a:ext>
+                  </a:extLst>
+                </a:gridCol>
+              </a:tblGrid>
+              <a:tr h="231378">
+                <a:tc>
+                  <a:txBody>
+                    <a:bodyPr/>
+                    <a:lstStyle/>
+                    <a:p>
+                      <a:pPr marL="0" marR="0" algn="just">
+                        <a:spcBef>
+                          <a:spcPts val="0"/>
+                        </a:spcBef>
+                        <a:spcAft>
+                          <a:spcPts val="0"/>
+                        </a:spcAft>
+                      </a:pPr>
+                      <a:r>
+                        <a:rPr lang="en-US" sz="1600" dirty="0">
+                          <a:solidFill>
+                            <a:schemeClr val="bg1"/>
+                          </a:solidFill>
+                          <a:effectLst/>
+                          <a:latin typeface="Consolas" panose="020B0609020204030204" pitchFamily="49" charset="0"/>
+                          <a:cs typeface="Consolas" panose="020B0609020204030204" pitchFamily="49" charset="0"/>
+                        </a:rPr>
+                        <a:t>C Program</a:t>
+                      </a:r>
+                      <a:endParaRPr lang="en-US" sz="1600" dirty="0">
+                        <a:solidFill>
+                          <a:schemeClr val="bg1"/>
+                        </a:solidFill>
+                        <a:effectLst/>
+                        <a:latin typeface="Consolas" panose="020B0609020204030204" pitchFamily="49" charset="0"/>
+                        <a:ea typeface="宋体"/>
+                        <a:cs typeface="Consolas" panose="020B0609020204030204" pitchFamily="49" charset="0"/>
+                      </a:endParaRPr>
+                    </a:p>
+                  </a:txBody>
+                  <a:tcPr marL="68580" marR="68580" marT="0" marB="0">
+                    <a:solidFill>
+                      <a:schemeClr val="accent1"/>
+                    </a:solidFill>
+                  </a:tcPr>
+                </a:tc>
+                <a:tc>
+                  <a:txBody>
+                    <a:bodyPr/>
+                    <a:lstStyle/>
+                    <a:p>
+                      <a:pPr marL="0" marR="0" algn="just">
+                        <a:spcBef>
+                          <a:spcPts val="0"/>
+                        </a:spcBef>
+                        <a:spcAft>
+                          <a:spcPts val="0"/>
+                        </a:spcAft>
+                      </a:pPr>
+                      <a:r>
+                        <a:rPr lang="en-US" sz="1600" dirty="0">
+                          <a:solidFill>
+                            <a:schemeClr val="bg1"/>
+                          </a:solidFill>
+                          <a:effectLst/>
+                          <a:latin typeface="Consolas" panose="020B0609020204030204" pitchFamily="49" charset="0"/>
+                          <a:cs typeface="Consolas" panose="020B0609020204030204" pitchFamily="49" charset="0"/>
+                        </a:rPr>
+                        <a:t>Assembly Program</a:t>
+                      </a:r>
+                      <a:endParaRPr lang="en-US" sz="1600" dirty="0">
+                        <a:solidFill>
+                          <a:schemeClr val="bg1"/>
+                        </a:solidFill>
+                        <a:effectLst/>
+                        <a:latin typeface="Consolas" panose="020B0609020204030204" pitchFamily="49" charset="0"/>
+                        <a:ea typeface="宋体"/>
+                        <a:cs typeface="Consolas" panose="020B0609020204030204" pitchFamily="49" charset="0"/>
+                      </a:endParaRPr>
+                    </a:p>
+                  </a:txBody>
+                  <a:tcPr marL="68580" marR="68580" marT="0" marB="0">
+                    <a:solidFill>
+                      <a:schemeClr val="accent1"/>
+                    </a:solidFill>
+                  </a:tcPr>
+                </a:tc>
+                <a:extLst>
+                  <a:ext uri="{0D108BD9-81ED-4DB2-BD59-A6C34878D82A}">
+                    <a16:rowId xmlns:a16="http://schemas.microsoft.com/office/drawing/2014/main" val="10000"/>
+                  </a:ext>
+                </a:extLst>
+              </a:tr>
+              <a:tr h="1619647">
+                <a:tc>
+                  <a:txBody>
+                    <a:bodyPr/>
+                    <a:lstStyle/>
+                    <a:p>
+                      <a:r>
+                        <a:rPr lang="en-US" sz="1600" b="0" dirty="0">
+                          <a:effectLst/>
+                          <a:latin typeface="Consolas" panose="020B0609020204030204" pitchFamily="49" charset="0"/>
+                          <a:ea typeface="宋体"/>
+                          <a:cs typeface="Consolas" panose="020B0609020204030204" pitchFamily="49" charset="0"/>
+                        </a:rPr>
+                        <a:t>int </a:t>
+                      </a:r>
+                      <a:r>
+                        <a:rPr lang="en-US" sz="1600" b="0" dirty="0" err="1">
+                          <a:effectLst/>
+                          <a:latin typeface="Consolas" panose="020B0609020204030204" pitchFamily="49" charset="0"/>
+                          <a:ea typeface="宋体"/>
+                          <a:cs typeface="Consolas" panose="020B0609020204030204" pitchFamily="49" charset="0"/>
+                        </a:rPr>
+                        <a:t>cnt</a:t>
+                      </a:r>
+                      <a:r>
+                        <a:rPr lang="en-US" sz="1600" b="0" dirty="0">
+                          <a:effectLst/>
+                          <a:latin typeface="Consolas" panose="020B0609020204030204" pitchFamily="49" charset="0"/>
+                          <a:ea typeface="宋体"/>
+                          <a:cs typeface="Consolas" panose="020B0609020204030204" pitchFamily="49" charset="0"/>
+                        </a:rPr>
+                        <a:t> = 10;</a:t>
+                      </a:r>
+                    </a:p>
+                    <a:p>
+                      <a:r>
+                        <a:rPr lang="en-US" sz="1600" b="0" dirty="0">
+                          <a:effectLst/>
+                          <a:latin typeface="Consolas" panose="020B0609020204030204" pitchFamily="49" charset="0"/>
+                          <a:ea typeface="宋体"/>
+                          <a:cs typeface="Consolas" panose="020B0609020204030204" pitchFamily="49" charset="0"/>
+                        </a:rPr>
+                        <a:t>while (</a:t>
+                      </a:r>
+                      <a:r>
+                        <a:rPr lang="en-US" sz="1600" b="0" dirty="0" err="1">
+                          <a:effectLst/>
+                          <a:latin typeface="Consolas" panose="020B0609020204030204" pitchFamily="49" charset="0"/>
+                          <a:ea typeface="宋体"/>
+                          <a:cs typeface="Consolas" panose="020B0609020204030204" pitchFamily="49" charset="0"/>
+                        </a:rPr>
+                        <a:t>cnt</a:t>
+                      </a:r>
+                      <a:r>
+                        <a:rPr lang="en-US" sz="1600" b="0" dirty="0">
+                          <a:effectLst/>
+                          <a:latin typeface="Consolas" panose="020B0609020204030204" pitchFamily="49" charset="0"/>
+                          <a:ea typeface="宋体"/>
+                          <a:cs typeface="Consolas" panose="020B0609020204030204" pitchFamily="49" charset="0"/>
+                        </a:rPr>
+                        <a:t> != 0) {</a:t>
+                      </a:r>
+                    </a:p>
+                    <a:p>
+                      <a:r>
+                        <a:rPr lang="en-US" sz="1600" b="0" dirty="0">
+                          <a:effectLst/>
+                          <a:latin typeface="Consolas" panose="020B0609020204030204" pitchFamily="49" charset="0"/>
+                          <a:ea typeface="宋体"/>
+                          <a:cs typeface="Consolas" panose="020B0609020204030204" pitchFamily="49" charset="0"/>
+                        </a:rPr>
+                        <a:t>    // loop body</a:t>
+                      </a:r>
+                    </a:p>
+                    <a:p>
+                      <a:r>
+                        <a:rPr lang="en-US" sz="1600" b="0" dirty="0">
+                          <a:effectLst/>
+                          <a:latin typeface="Consolas" panose="020B0609020204030204" pitchFamily="49" charset="0"/>
+                          <a:ea typeface="宋体"/>
+                          <a:cs typeface="Consolas" panose="020B0609020204030204" pitchFamily="49" charset="0"/>
+                        </a:rPr>
+                        <a:t>    </a:t>
+                      </a:r>
+                      <a:r>
+                        <a:rPr lang="en-US" sz="1600" b="0" dirty="0" err="1">
+                          <a:effectLst/>
+                          <a:latin typeface="Consolas" panose="020B0609020204030204" pitchFamily="49" charset="0"/>
+                          <a:ea typeface="宋体"/>
+                          <a:cs typeface="Consolas" panose="020B0609020204030204" pitchFamily="49" charset="0"/>
+                        </a:rPr>
+                        <a:t>cnt</a:t>
+                      </a:r>
+                      <a:r>
+                        <a:rPr lang="en-US" sz="1600" b="0" dirty="0">
+                          <a:effectLst/>
+                          <a:latin typeface="Consolas" panose="020B0609020204030204" pitchFamily="49" charset="0"/>
+                          <a:ea typeface="宋体"/>
+                          <a:cs typeface="Consolas" panose="020B0609020204030204" pitchFamily="49" charset="0"/>
+                        </a:rPr>
+                        <a:t>--;</a:t>
+                      </a:r>
+                    </a:p>
+                    <a:p>
+                      <a:r>
+                        <a:rPr lang="en-US" sz="1600" b="0" dirty="0">
+                          <a:effectLst/>
+                          <a:latin typeface="Consolas" panose="020B0609020204030204" pitchFamily="49" charset="0"/>
+                          <a:ea typeface="宋体"/>
+                          <a:cs typeface="Consolas" panose="020B0609020204030204" pitchFamily="49" charset="0"/>
+                        </a:rPr>
+                        <a:t>}</a:t>
+                      </a:r>
+                    </a:p>
+                    <a:p>
+                      <a:endParaRPr lang="en-US" sz="1600" b="0" dirty="0">
+                        <a:effectLst/>
+                        <a:latin typeface="Consolas" panose="020B0609020204030204" pitchFamily="49" charset="0"/>
+                        <a:ea typeface="宋体"/>
+                        <a:cs typeface="Consolas" panose="020B0609020204030204" pitchFamily="49" charset="0"/>
+                      </a:endParaRPr>
+                    </a:p>
+                  </a:txBody>
+                  <a:tcPr marL="68580" marR="68580" marT="0" marB="0"/>
+                </a:tc>
+                <a:tc>
+                  <a:txBody>
+                    <a:bodyPr/>
+                    <a:lstStyle/>
+                    <a:p>
+                      <a:pPr marL="0" marR="0" algn="just">
+                        <a:spcBef>
+                          <a:spcPts val="0"/>
+                        </a:spcBef>
+                        <a:spcAft>
+                          <a:spcPts val="0"/>
+                        </a:spcAft>
+                      </a:pPr>
+                      <a:r>
+                        <a:rPr lang="en-US" sz="1600" i="0" dirty="0">
+                          <a:effectLst/>
+                          <a:latin typeface="Consolas" panose="020B0609020204030204" pitchFamily="49" charset="0"/>
+                          <a:cs typeface="Consolas" panose="020B0609020204030204" pitchFamily="49" charset="0"/>
+                        </a:rPr>
+                        <a:t>MOV r0, #10          ; remaining iterations</a:t>
+                      </a:r>
+                    </a:p>
+                    <a:p>
+                      <a:pPr marL="0" marR="0" algn="just">
+                        <a:spcBef>
+                          <a:spcPts val="0"/>
+                        </a:spcBef>
+                        <a:spcAft>
+                          <a:spcPts val="0"/>
+                        </a:spcAft>
+                      </a:pPr>
+                      <a:r>
+                        <a:rPr lang="en-US" sz="1600" i="0" dirty="0">
                           <a:solidFill>
                             <a:srgbClr val="FF0000"/>
                           </a:solidFill>
@@ -13193,8 +13982,8 @@
         </p:nvSpPr>
         <p:spPr>
           <a:xfrm>
-            <a:off x="952500" y="4191000"/>
-            <a:ext cx="7239000" cy="1477328"/>
+            <a:off x="574548" y="5433060"/>
+            <a:ext cx="7918704" cy="1323439"/>
           </a:xfrm>
           <a:prstGeom prst="rect">
             <a:avLst/>
@@ -13226,35 +14015,43 @@
           <a:lstStyle/>
           <a:p>
             <a:r>
-              <a:rPr lang="en-US" dirty="0"/>
-              <a:t>SUB should be SUBS to set flags</a:t>
-            </a:r>
-          </a:p>
-          <a:p>
-            <a:r>
-              <a:rPr lang="en-US" dirty="0"/>
-              <a:t>Add a B check before loop body</a:t>
-            </a:r>
-          </a:p>
-          <a:p>
-            <a:r>
-              <a:rPr lang="en-US" dirty="0"/>
-              <a:t>(program behavior the same if </a:t>
-            </a:r>
-            <a:r>
-              <a:rPr lang="en-US" dirty="0" err="1"/>
+              <a:rPr lang="en-US" sz="1600" dirty="0"/>
+              <a:t>Error:  loop will run infinitely because the subtraction does not update the CPU condition flags.</a:t>
+            </a:r>
+          </a:p>
+          <a:p>
+            <a:r>
+              <a:rPr lang="en-US" sz="1600" dirty="0"/>
+              <a:t>ANS: use SUBS to set flags;  (optionally) add a B check before loop body</a:t>
+            </a:r>
+          </a:p>
+          <a:p>
+            <a:r>
+              <a:rPr lang="en-US" sz="1600" dirty="0"/>
+              <a:t>(W</a:t>
+            </a:r>
+            <a:r>
+              <a:rPr lang="en-US" altLang="zh-CN" sz="1600" dirty="0"/>
+              <a:t>ith or without “B check”, </a:t>
+            </a:r>
+            <a:r>
+              <a:rPr lang="en-US" sz="1600" dirty="0"/>
+              <a:t>program behavior is the same if </a:t>
+            </a:r>
+            <a:r>
+              <a:rPr lang="en-US" sz="1600" dirty="0" err="1"/>
               <a:t>cnt</a:t>
             </a:r>
             <a:r>
-              <a:rPr lang="en-US" dirty="0"/>
-              <a:t> = r0 = 10 initially with or without “B check”, but different if </a:t>
-            </a:r>
-            <a:r>
-              <a:rPr lang="en-US" dirty="0" err="1"/>
+              <a:rPr lang="en-US" sz="1600" dirty="0"/>
+              <a:t> = r0 = 10 initially, but different if </a:t>
+            </a:r>
+            <a:r>
+              <a:rPr lang="en-US" sz="1600" dirty="0" err="1"/>
               <a:t>cnt</a:t>
             </a:r>
             <a:r>
-              <a:rPr lang="en-US" dirty="0"/>
+              <a:rPr lang="en-US" sz="1600" dirty="0"/>
               <a:t> = r0 = 0 initially. c.f. pp 22-25 in Ch6 lecture on while loop and do-while loop. )</a:t>
             </a:r>
           </a:p>
@@ -13263,13 +14060,118 @@
     </p:spTree>
     <p:extLst>
       <p:ext uri="{BB962C8B-B14F-4D97-AF65-F5344CB8AC3E}">
-        <p14:creationId xmlns:p14="http://schemas.microsoft.com/office/powerpoint/2010/main" val="3322525658"/>
+        <p14:creationId xmlns:p14="http://schemas.microsoft.com/office/powerpoint/2010/main" val="1103341424"/>
       </p:ext>
     </p:extLst>
   </p:cSld>
   <p:clrMapOvr>
     <a:masterClrMapping/>
   </p:clrMapOvr>
+  <p:timing>
+    <p:tnLst>
+      <p:par>
+        <p:cTn id="1" dur="indefinite" restart="never" nodeType="tmRoot">
+          <p:childTnLst>
+            <p:seq concurrent="1" nextAc="seek">
+              <p:cTn id="2" dur="indefinite" nodeType="mainSeq">
+                <p:childTnLst>
+                  <p:par>
+                    <p:cTn id="3" fill="hold">
+                      <p:stCondLst>
+                        <p:cond delay="indefinite"/>
+                      </p:stCondLst>
+                      <p:childTnLst>
+                        <p:par>
+                          <p:cTn id="4" fill="hold">
+                            <p:stCondLst>
+                              <p:cond delay="0"/>
+                            </p:stCondLst>
+                            <p:childTnLst>
+                              <p:par>
+                                <p:cTn id="5" presetID="1" presetClass="entr" presetSubtype="0" fill="hold" nodeType="clickEffect">
+                                  <p:stCondLst>
+                                    <p:cond delay="0"/>
+                                  </p:stCondLst>
+                                  <p:childTnLst>
+                                    <p:set>
+                                      <p:cBhvr>
+                                        <p:cTn id="6" dur="1" fill="hold">
+                                          <p:stCondLst>
+                                            <p:cond delay="0"/>
+                                          </p:stCondLst>
+                                        </p:cTn>
+                                        <p:tgtEl>
+                                          <p:spTgt spid="4"/>
+                                        </p:tgtEl>
+                                        <p:attrNameLst>
+                                          <p:attrName>style.visibility</p:attrName>
+                                        </p:attrNameLst>
+                                      </p:cBhvr>
+                                      <p:to>
+                                        <p:strVal val="visible"/>
+                                      </p:to>
+                                    </p:set>
+                                  </p:childTnLst>
+                                </p:cTn>
+                              </p:par>
+                              <p:par>
+                                <p:cTn id="7" presetID="1" presetClass="entr" presetSubtype="0" fill="hold" grpId="0" nodeType="withEffect">
+                                  <p:stCondLst>
+                                    <p:cond delay="0"/>
+                                  </p:stCondLst>
+                                  <p:childTnLst>
+                                    <p:set>
+                                      <p:cBhvr>
+                                        <p:cTn id="8" dur="1" fill="hold">
+                                          <p:stCondLst>
+                                            <p:cond delay="0"/>
+                                          </p:stCondLst>
+                                        </p:cTn>
+                                        <p:tgtEl>
+                                          <p:spTgt spid="7"/>
+                                        </p:tgtEl>
+                                        <p:attrNameLst>
+                                          <p:attrName>style.visibility</p:attrName>
+                                        </p:attrNameLst>
+                                      </p:cBhvr>
+                                      <p:to>
+                                        <p:strVal val="visible"/>
+                                      </p:to>
+                                    </p:set>
+                                  </p:childTnLst>
+                                </p:cTn>
+                              </p:par>
+                            </p:childTnLst>
+                          </p:cTn>
+                        </p:par>
+                      </p:childTnLst>
+                    </p:cTn>
+                  </p:par>
+                </p:childTnLst>
+              </p:cTn>
+              <p:prevCondLst>
+                <p:cond evt="onPrev" delay="0">
+                  <p:tgtEl>
+                    <p:sldTgt/>
+                  </p:tgtEl>
+                </p:cond>
+              </p:prevCondLst>
+              <p:nextCondLst>
+                <p:cond evt="onNext" delay="0">
+                  <p:tgtEl>
+                    <p:sldTgt/>
+                  </p:tgtEl>
+                </p:cond>
+              </p:nextCondLst>
+            </p:seq>
+          </p:childTnLst>
+        </p:cTn>
+      </p:par>
+    </p:tnLst>
+    <p:bldLst>
+      <p:bldP spid="7" grpId="0" animBg="1"/>
+    </p:bldLst>
+  </p:timing>
 </p:sld>
 </file>
 
@@ -13324,7 +14226,7 @@
           <a:p>
             <a:r>
               <a:rPr lang="en-US" dirty="0"/>
-              <a:t>C to Assembly</a:t>
+              <a:t>C to Assembly, fill in blank</a:t>
             </a:r>
           </a:p>
         </p:txBody>
